--- a/docs/ativo/material_reuniao_orientador_2026-06-28.pptx
+++ b/docs/ativo/material_reuniao_orientador_2026-06-28.pptx
@@ -29,6 +29,11 @@
     <p:sldId id="277" r:id="rId28"/>
     <p:sldId id="278" r:id="rId29"/>
     <p:sldId id="279" r:id="rId30"/>
+    <p:sldId id="280" r:id="rId31"/>
+    <p:sldId id="281" r:id="rId32"/>
+    <p:sldId id="282" r:id="rId33"/>
+    <p:sldId id="283" r:id="rId34"/>
+    <p:sldId id="284" r:id="rId35"/>
   </p:sldIdLst>
   <p:sldSz cx="12188952" cy="6858000" type="screen4x3"/>
   <p:notesSz cx="6858000" cy="9144000"/>
@@ -5799,7 +5804,7 @@
               </a:defRPr>
             </a:pPr>
             <a:r>
-              <a:t>Estudo comparativo do Capítulo 2</a:t>
+              <a:t>Adequação ética — Resolução 200/2021 Unifesp</a:t>
             </a:r>
           </a:p>
           <a:p>
@@ -5811,7 +5816,7 @@
               </a:defRPr>
             </a:pPr>
             <a:r>
-              <a:t>4 configurações de conditioning — proposta + alternativa moderna</a:t>
+              <a:t>Enquadramento no Art. 8º — dispensa de submissão ao CEP</a:t>
             </a:r>
           </a:p>
         </p:txBody>
@@ -5864,7 +5869,7 @@
               </a:defRPr>
             </a:pPr>
             <a:r>
-              <a:t>4 configurações de conditioning comparadas</a:t>
+              <a:t>Avaliação normativa do projeto</a:t>
             </a:r>
           </a:p>
         </p:txBody>
@@ -5912,416 +5917,213 @@
           </a:p>
         </p:txBody>
       </p:sp>
-      <p:graphicFrame>
-        <p:nvGraphicFramePr>
-          <p:cNvPr id="4" name="Table 3"/>
-          <p:cNvGraphicFramePr>
-            <a:graphicFrameLocks noGrp="1"/>
-          </p:cNvGraphicFramePr>
+      <p:sp>
+        <p:nvSpPr>
+          <p:cNvPr id="4" name="TextBox 3"/>
+          <p:cNvSpPr txBox="1"/>
           <p:nvPr/>
-        </p:nvGraphicFramePr>
-        <p:xfrm>
-          <a:off x="457200" y="1371600"/>
-          <a:ext cx="11887200" cy="4754880"/>
-        </p:xfrm>
-        <a:graphic>
-          <a:graphicData uri="http://schemas.openxmlformats.org/drawingml/2006/table">
-            <a:tbl>
-              <a:tblPr firstRow="1" bandRow="1">
-                <a:tableStyleId>{5C22544A-7EE6-4342-B048-85BDC9FD1C3A}</a:tableStyleId>
-              </a:tblPr>
-              <a:tblGrid>
-                <a:gridCol w="914400"/>
-                <a:gridCol w="3200400"/>
-                <a:gridCol w="4114800"/>
-                <a:gridCol w="3657600"/>
-              </a:tblGrid>
-              <a:tr h="950976">
-                <a:tc>
-                  <a:txBody>
-                    <a:bodyPr/>
-                    <a:lstStyle/>
-                    <a:p>
-                      <a:r>
-                        <a:rPr sz="1300" b="1">
-                          <a:solidFill>
-                            <a:srgbClr val="FFFFFF"/>
-                          </a:solidFill>
-                        </a:rPr>
-                        <a:t>Config</a:t>
-                      </a:r>
-                    </a:p>
-                  </a:txBody>
-                  <a:tcPr>
-                    <a:solidFill>
-                      <a:srgbClr val="1F2A4E"/>
-                    </a:solidFill>
-                  </a:tcPr>
-                </a:tc>
-                <a:tc>
-                  <a:txBody>
-                    <a:bodyPr/>
-                    <a:lstStyle/>
-                    <a:p>
-                      <a:r>
-                        <a:rPr sz="1300" b="1">
-                          <a:solidFill>
-                            <a:srgbClr val="FFFFFF"/>
-                          </a:solidFill>
-                        </a:rPr>
-                        <a:t>Arquitetura</a:t>
-                      </a:r>
-                    </a:p>
-                  </a:txBody>
-                  <a:tcPr>
-                    <a:solidFill>
-                      <a:srgbClr val="1F2A4E"/>
-                    </a:solidFill>
-                  </a:tcPr>
-                </a:tc>
-                <a:tc>
-                  <a:txBody>
-                    <a:bodyPr/>
-                    <a:lstStyle/>
-                    <a:p>
-                      <a:r>
-                        <a:rPr sz="1300" b="1">
-                          <a:solidFill>
-                            <a:srgbClr val="FFFFFF"/>
-                          </a:solidFill>
-                        </a:rPr>
-                        <a:t>Sinal de conditioning</a:t>
-                      </a:r>
-                    </a:p>
-                  </a:txBody>
-                  <a:tcPr>
-                    <a:solidFill>
-                      <a:srgbClr val="1F2A4E"/>
-                    </a:solidFill>
-                  </a:tcPr>
-                </a:tc>
-                <a:tc>
-                  <a:txBody>
-                    <a:bodyPr/>
-                    <a:lstStyle/>
-                    <a:p>
-                      <a:r>
-                        <a:rPr sz="1300" b="1">
-                          <a:solidFill>
-                            <a:srgbClr val="FFFFFF"/>
-                          </a:solidFill>
-                        </a:rPr>
-                        <a:t>Origem</a:t>
-                      </a:r>
-                    </a:p>
-                  </a:txBody>
-                  <a:tcPr>
-                    <a:solidFill>
-                      <a:srgbClr val="1F2A4E"/>
-                    </a:solidFill>
-                  </a:tcPr>
-                </a:tc>
-              </a:tr>
-              <a:tr h="950976">
-                <a:tc>
-                  <a:txBody>
-                    <a:bodyPr/>
-                    <a:lstStyle/>
-                    <a:p>
-                      <a:r>
-                        <a:rPr sz="1100">
-                          <a:solidFill>
-                            <a:srgbClr val="3D424E"/>
-                          </a:solidFill>
-                        </a:rPr>
-                        <a:t>A</a:t>
-                      </a:r>
-                    </a:p>
-                  </a:txBody>
-                  <a:tcPr/>
-                </a:tc>
-                <a:tc>
-                  <a:txBody>
-                    <a:bodyPr/>
-                    <a:lstStyle/>
-                    <a:p>
-                      <a:r>
-                        <a:rPr sz="1100">
-                          <a:solidFill>
-                            <a:srgbClr val="3D424E"/>
-                          </a:solidFill>
-                        </a:rPr>
-                        <a:t>ConvNeXt-T baseline</a:t>
-                      </a:r>
-                    </a:p>
-                  </a:txBody>
-                  <a:tcPr/>
-                </a:tc>
-                <a:tc>
-                  <a:txBody>
-                    <a:bodyPr/>
-                    <a:lstStyle/>
-                    <a:p>
-                      <a:r>
-                        <a:rPr sz="1100">
-                          <a:solidFill>
-                            <a:srgbClr val="3D424E"/>
-                          </a:solidFill>
-                        </a:rPr>
-                        <a:t>Sem conditioning</a:t>
-                      </a:r>
-                    </a:p>
-                  </a:txBody>
-                  <a:tcPr/>
-                </a:tc>
-                <a:tc>
-                  <a:txBody>
-                    <a:bodyPr/>
-                    <a:lstStyle/>
-                    <a:p>
-                      <a:r>
-                        <a:rPr sz="1100">
-                          <a:solidFill>
-                            <a:srgbClr val="3D424E"/>
-                          </a:solidFill>
-                        </a:rPr>
-                        <a:t>Controle</a:t>
-                      </a:r>
-                    </a:p>
-                  </a:txBody>
-                  <a:tcPr/>
-                </a:tc>
-              </a:tr>
-              <a:tr h="950976">
-                <a:tc>
-                  <a:txBody>
-                    <a:bodyPr/>
-                    <a:lstStyle/>
-                    <a:p>
-                      <a:r>
-                        <a:rPr sz="1100">
-                          <a:solidFill>
-                            <a:srgbClr val="3D424E"/>
-                          </a:solidFill>
-                        </a:rPr>
-                        <a:t>B</a:t>
-                      </a:r>
-                    </a:p>
-                  </a:txBody>
-                  <a:tcPr>
-                    <a:solidFill>
-                      <a:srgbClr val="E8EAED"/>
-                    </a:solidFill>
-                  </a:tcPr>
-                </a:tc>
-                <a:tc>
-                  <a:txBody>
-                    <a:bodyPr/>
-                    <a:lstStyle/>
-                    <a:p>
-                      <a:r>
-                        <a:rPr sz="1100">
-                          <a:solidFill>
-                            <a:srgbClr val="3D424E"/>
-                          </a:solidFill>
-                        </a:rPr>
-                        <a:t>ConvNeXt-T + FiLM</a:t>
-                      </a:r>
-                    </a:p>
-                  </a:txBody>
-                  <a:tcPr>
-                    <a:solidFill>
-                      <a:srgbClr val="E8EAED"/>
-                    </a:solidFill>
-                  </a:tcPr>
-                </a:tc>
-                <a:tc>
-                  <a:txBody>
-                    <a:bodyPr/>
-                    <a:lstStyle/>
-                    <a:p>
-                      <a:r>
-                        <a:rPr sz="1100">
-                          <a:solidFill>
-                            <a:srgbClr val="3D424E"/>
-                          </a:solidFill>
-                        </a:rPr>
-                        <a:t>MST 10-dim → γ, β</a:t>
-                      </a:r>
-                    </a:p>
-                  </a:txBody>
-                  <a:tcPr>
-                    <a:solidFill>
-                      <a:srgbClr val="E8EAED"/>
-                    </a:solidFill>
-                  </a:tcPr>
-                </a:tc>
-                <a:tc>
-                  <a:txBody>
-                    <a:bodyPr/>
-                    <a:lstStyle/>
-                    <a:p>
-                      <a:r>
-                        <a:rPr sz="1100">
-                          <a:solidFill>
-                            <a:srgbClr val="3D424E"/>
-                          </a:solidFill>
-                        </a:rPr>
-                        <a:t>Proposta principal (linha tradicional)</a:t>
-                      </a:r>
-                    </a:p>
-                  </a:txBody>
-                  <a:tcPr>
-                    <a:solidFill>
-                      <a:srgbClr val="E8EAED"/>
-                    </a:solidFill>
-                  </a:tcPr>
-                </a:tc>
-              </a:tr>
-              <a:tr h="950976">
-                <a:tc>
-                  <a:txBody>
-                    <a:bodyPr/>
-                    <a:lstStyle/>
-                    <a:p>
-                      <a:r>
-                        <a:rPr sz="1100">
-                          <a:solidFill>
-                            <a:srgbClr val="3D424E"/>
-                          </a:solidFill>
-                        </a:rPr>
-                        <a:t>C</a:t>
-                      </a:r>
-                    </a:p>
-                  </a:txBody>
-                  <a:tcPr/>
-                </a:tc>
-                <a:tc>
-                  <a:txBody>
-                    <a:bodyPr/>
-                    <a:lstStyle/>
-                    <a:p>
-                      <a:r>
-                        <a:rPr sz="1100">
-                          <a:solidFill>
-                            <a:srgbClr val="3D424E"/>
-                          </a:solidFill>
-                        </a:rPr>
-                        <a:t>ConvNeXt-T + Gated FiLM</a:t>
-                      </a:r>
-                    </a:p>
-                  </a:txBody>
-                  <a:tcPr/>
-                </a:tc>
-                <a:tc>
-                  <a:txBody>
-                    <a:bodyPr/>
-                    <a:lstStyle/>
-                    <a:p>
-                      <a:r>
-                        <a:rPr sz="1100">
-                          <a:solidFill>
-                            <a:srgbClr val="3D424E"/>
-                          </a:solidFill>
-                        </a:rPr>
-                        <a:t>MST 10-dim → γ, β não-lineares</a:t>
-                      </a:r>
-                    </a:p>
-                  </a:txBody>
-                  <a:tcPr/>
-                </a:tc>
-                <a:tc>
-                  <a:txBody>
-                    <a:bodyPr/>
-                    <a:lstStyle/>
-                    <a:p>
-                      <a:r>
-                        <a:rPr sz="1100">
-                          <a:solidFill>
-                            <a:srgbClr val="3D424E"/>
-                          </a:solidFill>
-                        </a:rPr>
-                        <a:t>Ablação metodológica</a:t>
-                      </a:r>
-                    </a:p>
-                  </a:txBody>
-                  <a:tcPr/>
-                </a:tc>
-              </a:tr>
-              <a:tr h="950976">
-                <a:tc>
-                  <a:txBody>
-                    <a:bodyPr/>
-                    <a:lstStyle/>
-                    <a:p>
-                      <a:r>
-                        <a:rPr sz="1100">
-                          <a:solidFill>
-                            <a:srgbClr val="3D424E"/>
-                          </a:solidFill>
-                        </a:rPr>
-                        <a:t>D</a:t>
-                      </a:r>
-                    </a:p>
-                  </a:txBody>
-                  <a:tcPr/>
-                </a:tc>
-                <a:tc>
-                  <a:txBody>
-                    <a:bodyPr/>
-                    <a:lstStyle/>
-                    <a:p>
-                      <a:r>
-                        <a:rPr sz="1100">
-                          <a:solidFill>
-                            <a:srgbClr val="3D424E"/>
-                          </a:solidFill>
-                        </a:rPr>
-                        <a:t>ConvNeXt-T + FiLM</a:t>
-                      </a:r>
-                    </a:p>
-                  </a:txBody>
-                  <a:tcPr/>
-                </a:tc>
-                <a:tc>
-                  <a:txBody>
-                    <a:bodyPr/>
-                    <a:lstStyle/>
-                    <a:p>
-                      <a:r>
-                        <a:rPr sz="1100">
-                          <a:solidFill>
-                            <a:srgbClr val="3D424E"/>
-                          </a:solidFill>
-                        </a:rPr>
-                        <a:t>Embedding CLIP-text 512-dim</a:t>
-                      </a:r>
-                    </a:p>
-                  </a:txBody>
-                  <a:tcPr/>
-                </a:tc>
-                <a:tc>
-                  <a:txBody>
-                    <a:bodyPr/>
-                    <a:lstStyle/>
-                    <a:p>
-                      <a:r>
-                        <a:rPr sz="1100">
-                          <a:solidFill>
-                            <a:srgbClr val="3D424E"/>
-                          </a:solidFill>
-                        </a:rPr>
-                        <a:t>Avaliação alternativa (orientador)</a:t>
-                      </a:r>
-                    </a:p>
-                  </a:txBody>
-                  <a:tcPr/>
-                </a:tc>
-              </a:tr>
-            </a:tbl>
-          </a:graphicData>
-        </a:graphic>
-      </p:graphicFrame>
+        </p:nvSpPr>
+        <p:spPr>
+          <a:xfrm>
+            <a:off x="457200" y="1371600"/>
+            <a:ext cx="11430000" cy="4937760"/>
+          </a:xfrm>
+          <a:prstGeom prst="rect">
+            <a:avLst/>
+          </a:prstGeom>
+          <a:noFill/>
+        </p:spPr>
+        <p:txBody>
+          <a:bodyPr wrap="square">
+            <a:spAutoFit/>
+          </a:bodyPr>
+          <a:lstStyle/>
+          <a:p>
+            <a:pPr>
+              <a:spcAft>
+                <a:spcPts val="800"/>
+              </a:spcAft>
+            </a:pPr>
+            <a:r>
+              <a:rPr sz="1600" b="1">
+                <a:solidFill>
+                  <a:srgbClr val="1F2A4E"/>
+                </a:solidFill>
+              </a:rPr>
+              <a:t>Base legal:  </a:t>
+            </a:r>
+            <a:r>
+              <a:rPr sz="1600">
+                <a:solidFill>
+                  <a:srgbClr val="3D424E"/>
+                </a:solidFill>
+              </a:rPr>
+              <a:t>Resolução nº 200/2021/CONSELHO UNIVERSITÁRIO Unifesp (SEI 0719529)</a:t>
+            </a:r>
+          </a:p>
+          <a:p>
+            <a:pPr>
+              <a:spcAft>
+                <a:spcPts val="800"/>
+              </a:spcAft>
+            </a:pPr>
+            <a:r>
+              <a:rPr sz="1600" b="1">
+                <a:solidFill>
+                  <a:srgbClr val="1F2A4E"/>
+                </a:solidFill>
+              </a:rPr>
+              <a:t>Pergunta central:  </a:t>
+            </a:r>
+            <a:r>
+              <a:rPr sz="1600">
+                <a:solidFill>
+                  <a:srgbClr val="3D424E"/>
+                </a:solidFill>
+              </a:rPr>
+              <a:t>o projeto envolve, direta ou indiretamente, seres humanos?</a:t>
+            </a:r>
+          </a:p>
+          <a:p>
+            <a:pPr>
+              <a:spcAft>
+                <a:spcPts val="800"/>
+              </a:spcAft>
+            </a:pPr>
+            <a:r>
+              <a:rPr sz="1600" b="1">
+                <a:solidFill>
+                  <a:srgbClr val="1F2A4E"/>
+                </a:solidFill>
+              </a:rPr>
+              <a:t>  </a:t>
+            </a:r>
+            <a:r>
+              <a:rPr sz="1600">
+                <a:solidFill>
+                  <a:srgbClr val="3D424E"/>
+                </a:solidFill>
+              </a:rPr>
+              <a:t/>
+            </a:r>
+          </a:p>
+          <a:p>
+            <a:pPr>
+              <a:spcAft>
+                <a:spcPts val="800"/>
+              </a:spcAft>
+            </a:pPr>
+            <a:r>
+              <a:rPr sz="1600" b="1">
+                <a:solidFill>
+                  <a:srgbClr val="1F2A4E"/>
+                </a:solidFill>
+              </a:rPr>
+              <a:t>Análise:  </a:t>
+            </a:r>
+            <a:r>
+              <a:rPr sz="1600">
+                <a:solidFill>
+                  <a:srgbClr val="3D424E"/>
+                </a:solidFill>
+              </a:rPr>
+              <a:t>uso exclusivo de datasets secundários públicos (FairFace, RFW, BFW, BUPT) — sem coleta primária</a:t>
+            </a:r>
+          </a:p>
+          <a:p>
+            <a:pPr>
+              <a:spcAft>
+                <a:spcPts val="800"/>
+              </a:spcAft>
+            </a:pPr>
+            <a:r>
+              <a:rPr sz="1600" b="1">
+                <a:solidFill>
+                  <a:srgbClr val="1F2A4E"/>
+                </a:solidFill>
+              </a:rPr>
+              <a:t>Análise:  </a:t>
+            </a:r>
+            <a:r>
+              <a:rPr sz="1600">
+                <a:solidFill>
+                  <a:srgbClr val="3D424E"/>
+                </a:solidFill>
+              </a:rPr>
+              <a:t>pesquisa puramente computacional — sem intervenção sobre seres humanos</a:t>
+            </a:r>
+          </a:p>
+          <a:p>
+            <a:pPr>
+              <a:spcAft>
+                <a:spcPts val="800"/>
+              </a:spcAft>
+            </a:pPr>
+            <a:r>
+              <a:rPr sz="1600" b="1">
+                <a:solidFill>
+                  <a:srgbClr val="1F2A4E"/>
+                </a:solidFill>
+              </a:rPr>
+              <a:t>Ajuste aplicado (v3.6):  </a:t>
+            </a:r>
+            <a:r>
+              <a:rPr sz="1600">
+                <a:solidFill>
+                  <a:srgbClr val="3D424E"/>
+                </a:solidFill>
+              </a:rPr>
+              <a:t>validação manual do OE-1 substituída por validação interna pela equipe acadêmica</a:t>
+            </a:r>
+          </a:p>
+          <a:p>
+            <a:pPr>
+              <a:spcAft>
+                <a:spcPts val="800"/>
+              </a:spcAft>
+            </a:pPr>
+            <a:r>
+              <a:rPr sz="1600" b="1">
+                <a:solidFill>
+                  <a:srgbClr val="1F2A4E"/>
+                </a:solidFill>
+              </a:rPr>
+              <a:t>  </a:t>
+            </a:r>
+            <a:r>
+              <a:rPr sz="1600">
+                <a:solidFill>
+                  <a:srgbClr val="3D424E"/>
+                </a:solidFill>
+              </a:rPr>
+              <a:t/>
+            </a:r>
+          </a:p>
+          <a:p>
+            <a:pPr>
+              <a:spcAft>
+                <a:spcPts val="800"/>
+              </a:spcAft>
+            </a:pPr>
+            <a:r>
+              <a:rPr sz="1600" b="1">
+                <a:solidFill>
+                  <a:srgbClr val="1F2A4E"/>
+                </a:solidFill>
+              </a:rPr>
+              <a:t>Enquadramento:  </a:t>
+            </a:r>
+            <a:r>
+              <a:rPr sz="1600">
+                <a:solidFill>
+                  <a:srgbClr val="3D424E"/>
+                </a:solidFill>
+              </a:rPr>
+              <a:t>Art. 8º — dispensa de cadastro no CEP, exige apenas Declaração de Responsabilidade</a:t>
+            </a:r>
+          </a:p>
+        </p:txBody>
+      </p:sp>
       <p:sp>
         <p:nvSpPr>
           <p:cNvPr id="5" name="TextBox 4"/>
@@ -6352,7 +6154,7 @@
               </a:defRPr>
             </a:pPr>
             <a:r>
-              <a:t>Atende recomendação da reunião 15/jun: linha tradicional + avaliação CLIP.</a:t>
+              <a:t>Detalhamento em _checklist_etica_cep.md</a:t>
             </a:r>
           </a:p>
         </p:txBody>
@@ -6609,7 +6411,7 @@
                   <a:srgbClr val="3D424E"/>
                 </a:solidFill>
               </a:rPr>
-              <a:t>Estudo comparativo Cap 2 — 4 configurações de conditioning</a:t>
+              <a:t>Adequação ética — Resolução 200/2021/CONSU Unifesp</a:t>
             </a:r>
           </a:p>
           <a:p>
@@ -6632,7 +6434,30 @@
                   <a:srgbClr val="3D424E"/>
                 </a:solidFill>
               </a:rPr>
-              <a:t>Decisões a alinhar + próximos passos da escrita</a:t>
+              <a:t>Estudo comparativo Cap 2 — 4 configurações de conditioning</a:t>
+            </a:r>
+          </a:p>
+          <a:p>
+            <a:pPr>
+              <a:spcAft>
+                <a:spcPts val="800"/>
+              </a:spcAft>
+            </a:pPr>
+            <a:r>
+              <a:rPr sz="1600" b="1">
+                <a:solidFill>
+                  <a:srgbClr val="1F2A4E"/>
+                </a:solidFill>
+              </a:rPr>
+              <a:t>8.  </a:t>
+            </a:r>
+            <a:r>
+              <a:rPr sz="1600">
+                <a:solidFill>
+                  <a:srgbClr val="3D424E"/>
+                </a:solidFill>
+              </a:rPr>
+              <a:t>Decisões a alinhar + solicitação pessoal + próximos passos</a:t>
             </a:r>
           </a:p>
         </p:txBody>
@@ -6646,6 +6471,786 @@
 </file>
 
 <file path=ppt/slides/slide20.xml><?xml version="1.0" encoding="utf-8"?>
+<p:sld xmlns:a="http://schemas.openxmlformats.org/drawingml/2006/main" xmlns:p="http://schemas.openxmlformats.org/presentationml/2006/main" xmlns:r="http://schemas.openxmlformats.org/officeDocument/2006/relationships">
+  <p:cSld>
+    <p:spTree>
+      <p:nvGrpSpPr>
+        <p:cNvPr id="1" name=""/>
+        <p:cNvGrpSpPr/>
+        <p:nvPr/>
+      </p:nvGrpSpPr>
+      <p:grpSpPr/>
+      <p:sp>
+        <p:nvSpPr>
+          <p:cNvPr id="2" name="TextBox 1"/>
+          <p:cNvSpPr txBox="1"/>
+          <p:nvPr/>
+        </p:nvSpPr>
+        <p:spPr>
+          <a:xfrm>
+            <a:off x="457200" y="365760"/>
+            <a:ext cx="11430000" cy="822960"/>
+          </a:xfrm>
+          <a:prstGeom prst="rect">
+            <a:avLst/>
+          </a:prstGeom>
+          <a:noFill/>
+        </p:spPr>
+        <p:txBody>
+          <a:bodyPr wrap="square">
+            <a:spAutoFit/>
+          </a:bodyPr>
+          <a:lstStyle/>
+          <a:p>
+            <a:pPr>
+              <a:defRPr sz="2600" b="1">
+                <a:solidFill>
+                  <a:srgbClr val="1F2A4E"/>
+                </a:solidFill>
+              </a:defRPr>
+            </a:pPr>
+            <a:r>
+              <a:t>Ajuste técnico no OE-1 — validação manual</a:t>
+            </a:r>
+          </a:p>
+        </p:txBody>
+      </p:sp>
+      <p:sp>
+        <p:nvSpPr>
+          <p:cNvPr id="3" name="Rectangle 2"/>
+          <p:cNvSpPr/>
+          <p:nvPr/>
+        </p:nvSpPr>
+        <p:spPr>
+          <a:xfrm>
+            <a:off x="457200" y="1143000"/>
+            <a:ext cx="11430000" cy="36576"/>
+          </a:xfrm>
+          <a:prstGeom prst="rect">
+            <a:avLst/>
+          </a:prstGeom>
+          <a:solidFill>
+            <a:srgbClr val="1F2A4E"/>
+          </a:solidFill>
+          <a:ln>
+            <a:noFill/>
+          </a:ln>
+        </p:spPr>
+        <p:style>
+          <a:lnRef idx="1">
+            <a:schemeClr val="accent1"/>
+          </a:lnRef>
+          <a:fillRef idx="3">
+            <a:schemeClr val="accent1"/>
+          </a:fillRef>
+          <a:effectRef idx="2">
+            <a:schemeClr val="accent1"/>
+          </a:effectRef>
+          <a:fontRef idx="minor">
+            <a:schemeClr val="lt1"/>
+          </a:fontRef>
+        </p:style>
+        <p:txBody>
+          <a:bodyPr rtlCol="0" anchor="ctr"/>
+          <a:lstStyle/>
+          <a:p>
+            <a:pPr algn="ctr"/>
+          </a:p>
+        </p:txBody>
+      </p:sp>
+      <p:graphicFrame>
+        <p:nvGraphicFramePr>
+          <p:cNvPr id="4" name="Table 3"/>
+          <p:cNvGraphicFramePr>
+            <a:graphicFrameLocks noGrp="1"/>
+          </p:cNvGraphicFramePr>
+          <p:nvPr/>
+        </p:nvGraphicFramePr>
+        <p:xfrm>
+          <a:off x="457200" y="1371600"/>
+          <a:ext cx="11430000" cy="4754880"/>
+        </p:xfrm>
+        <a:graphic>
+          <a:graphicData uri="http://schemas.openxmlformats.org/drawingml/2006/table">
+            <a:tbl>
+              <a:tblPr firstRow="1" bandRow="1">
+                <a:tableStyleId>{5C22544A-7EE6-4342-B048-85BDC9FD1C3A}</a:tableStyleId>
+              </a:tblPr>
+              <a:tblGrid>
+                <a:gridCol w="2286000"/>
+                <a:gridCol w="4114800"/>
+                <a:gridCol w="5029200"/>
+              </a:tblGrid>
+              <a:tr h="792480">
+                <a:tc>
+                  <a:txBody>
+                    <a:bodyPr/>
+                    <a:lstStyle/>
+                    <a:p>
+                      <a:r>
+                        <a:rPr sz="1300" b="1">
+                          <a:solidFill>
+                            <a:srgbClr val="FFFFFF"/>
+                          </a:solidFill>
+                        </a:rPr>
+                        <a:t>Aspecto</a:t>
+                      </a:r>
+                    </a:p>
+                  </a:txBody>
+                  <a:tcPr>
+                    <a:solidFill>
+                      <a:srgbClr val="1F2A4E"/>
+                    </a:solidFill>
+                  </a:tcPr>
+                </a:tc>
+                <a:tc>
+                  <a:txBody>
+                    <a:bodyPr/>
+                    <a:lstStyle/>
+                    <a:p>
+                      <a:r>
+                        <a:rPr sz="1300" b="1">
+                          <a:solidFill>
+                            <a:srgbClr val="FFFFFF"/>
+                          </a:solidFill>
+                        </a:rPr>
+                        <a:t>Versão anterior (v3.5)</a:t>
+                      </a:r>
+                    </a:p>
+                  </a:txBody>
+                  <a:tcPr>
+                    <a:solidFill>
+                      <a:srgbClr val="1F2A4E"/>
+                    </a:solidFill>
+                  </a:tcPr>
+                </a:tc>
+                <a:tc>
+                  <a:txBody>
+                    <a:bodyPr/>
+                    <a:lstStyle/>
+                    <a:p>
+                      <a:r>
+                        <a:rPr sz="1300" b="1">
+                          <a:solidFill>
+                            <a:srgbClr val="FFFFFF"/>
+                          </a:solidFill>
+                        </a:rPr>
+                        <a:t>Versão ajustada (v3.6)</a:t>
+                      </a:r>
+                    </a:p>
+                  </a:txBody>
+                  <a:tcPr>
+                    <a:solidFill>
+                      <a:srgbClr val="1F2A4E"/>
+                    </a:solidFill>
+                  </a:tcPr>
+                </a:tc>
+              </a:tr>
+              <a:tr h="792480">
+                <a:tc>
+                  <a:txBody>
+                    <a:bodyPr/>
+                    <a:lstStyle/>
+                    <a:p>
+                      <a:r>
+                        <a:rPr sz="1100">
+                          <a:solidFill>
+                            <a:srgbClr val="3D424E"/>
+                          </a:solidFill>
+                        </a:rPr>
+                        <a:t>Método</a:t>
+                      </a:r>
+                    </a:p>
+                  </a:txBody>
+                  <a:tcPr/>
+                </a:tc>
+                <a:tc>
+                  <a:txBody>
+                    <a:bodyPr/>
+                    <a:lstStyle/>
+                    <a:p>
+                      <a:r>
+                        <a:rPr sz="1100">
+                          <a:solidFill>
+                            <a:srgbClr val="3D424E"/>
+                          </a:solidFill>
+                        </a:rPr>
+                        <a:t>Crowdsourcing externo via Prolific</a:t>
+                      </a:r>
+                    </a:p>
+                  </a:txBody>
+                  <a:tcPr/>
+                </a:tc>
+                <a:tc>
+                  <a:txBody>
+                    <a:bodyPr/>
+                    <a:lstStyle/>
+                    <a:p>
+                      <a:r>
+                        <a:rPr sz="1100">
+                          <a:solidFill>
+                            <a:srgbClr val="3D424E"/>
+                          </a:solidFill>
+                        </a:rPr>
+                        <a:t>Validação interna pela equipe acadêmica</a:t>
+                      </a:r>
+                    </a:p>
+                  </a:txBody>
+                  <a:tcPr/>
+                </a:tc>
+              </a:tr>
+              <a:tr h="792480">
+                <a:tc>
+                  <a:txBody>
+                    <a:bodyPr/>
+                    <a:lstStyle/>
+                    <a:p>
+                      <a:r>
+                        <a:rPr sz="1100">
+                          <a:solidFill>
+                            <a:srgbClr val="3D424E"/>
+                          </a:solidFill>
+                        </a:rPr>
+                        <a:t>Anotadores</a:t>
+                      </a:r>
+                    </a:p>
+                  </a:txBody>
+                  <a:tcPr/>
+                </a:tc>
+                <a:tc>
+                  <a:txBody>
+                    <a:bodyPr/>
+                    <a:lstStyle/>
+                    <a:p>
+                      <a:r>
+                        <a:rPr sz="1100">
+                          <a:solidFill>
+                            <a:srgbClr val="3D424E"/>
+                          </a:solidFill>
+                        </a:rPr>
+                        <a:t>~3 anotadores externos pagos</a:t>
+                      </a:r>
+                    </a:p>
+                  </a:txBody>
+                  <a:tcPr/>
+                </a:tc>
+                <a:tc>
+                  <a:txBody>
+                    <a:bodyPr/>
+                    <a:lstStyle/>
+                    <a:p>
+                      <a:r>
+                        <a:rPr sz="1100">
+                          <a:solidFill>
+                            <a:srgbClr val="3D424E"/>
+                          </a:solidFill>
+                        </a:rPr>
+                        <a:t>Mestrando + Orientador (+ Co-orientador, se designado)</a:t>
+                      </a:r>
+                    </a:p>
+                  </a:txBody>
+                  <a:tcPr/>
+                </a:tc>
+              </a:tr>
+              <a:tr h="792480">
+                <a:tc>
+                  <a:txBody>
+                    <a:bodyPr/>
+                    <a:lstStyle/>
+                    <a:p>
+                      <a:r>
+                        <a:rPr sz="1100">
+                          <a:solidFill>
+                            <a:srgbClr val="3D424E"/>
+                          </a:solidFill>
+                        </a:rPr>
+                        <a:t>Escala</a:t>
+                      </a:r>
+                    </a:p>
+                  </a:txBody>
+                  <a:tcPr/>
+                </a:tc>
+                <a:tc>
+                  <a:txBody>
+                    <a:bodyPr/>
+                    <a:lstStyle/>
+                    <a:p>
+                      <a:r>
+                        <a:rPr sz="1100">
+                          <a:solidFill>
+                            <a:srgbClr val="3D424E"/>
+                          </a:solidFill>
+                        </a:rPr>
+                        <a:t>~700 imagens estratificadas</a:t>
+                      </a:r>
+                    </a:p>
+                  </a:txBody>
+                  <a:tcPr/>
+                </a:tc>
+                <a:tc>
+                  <a:txBody>
+                    <a:bodyPr/>
+                    <a:lstStyle/>
+                    <a:p>
+                      <a:r>
+                        <a:rPr sz="1100">
+                          <a:solidFill>
+                            <a:srgbClr val="3D424E"/>
+                          </a:solidFill>
+                        </a:rPr>
+                        <a:t>~200-300 imagens estratificadas</a:t>
+                      </a:r>
+                    </a:p>
+                  </a:txBody>
+                  <a:tcPr/>
+                </a:tc>
+              </a:tr>
+              <a:tr h="792480">
+                <a:tc>
+                  <a:txBody>
+                    <a:bodyPr/>
+                    <a:lstStyle/>
+                    <a:p>
+                      <a:r>
+                        <a:rPr sz="1100">
+                          <a:solidFill>
+                            <a:srgbClr val="3D424E"/>
+                          </a:solidFill>
+                        </a:rPr>
+                        <a:t>Estratificação</a:t>
+                      </a:r>
+                    </a:p>
+                  </a:txBody>
+                  <a:tcPr/>
+                </a:tc>
+                <a:tc>
+                  <a:txBody>
+                    <a:bodyPr/>
+                    <a:lstStyle/>
+                    <a:p>
+                      <a:r>
+                        <a:rPr sz="1100">
+                          <a:solidFill>
+                            <a:srgbClr val="3D424E"/>
+                          </a:solidFill>
+                        </a:rPr>
+                        <a:t>Por raça e tom MST</a:t>
+                      </a:r>
+                    </a:p>
+                  </a:txBody>
+                  <a:tcPr/>
+                </a:tc>
+                <a:tc>
+                  <a:txBody>
+                    <a:bodyPr/>
+                    <a:lstStyle/>
+                    <a:p>
+                      <a:r>
+                        <a:rPr sz="1100">
+                          <a:solidFill>
+                            <a:srgbClr val="3D424E"/>
+                          </a:solidFill>
+                        </a:rPr>
+                        <a:t>Por raça e tom MST (preservada)</a:t>
+                      </a:r>
+                    </a:p>
+                  </a:txBody>
+                  <a:tcPr/>
+                </a:tc>
+              </a:tr>
+              <a:tr h="792480">
+                <a:tc>
+                  <a:txBody>
+                    <a:bodyPr/>
+                    <a:lstStyle/>
+                    <a:p>
+                      <a:r>
+                        <a:rPr sz="1100">
+                          <a:solidFill>
+                            <a:srgbClr val="3D424E"/>
+                          </a:solidFill>
+                        </a:rPr>
+                        <a:t>Implicação ética</a:t>
+                      </a:r>
+                    </a:p>
+                  </a:txBody>
+                  <a:tcPr>
+                    <a:solidFill>
+                      <a:srgbClr val="E8EAED"/>
+                    </a:solidFill>
+                  </a:tcPr>
+                </a:tc>
+                <a:tc>
+                  <a:txBody>
+                    <a:bodyPr/>
+                    <a:lstStyle/>
+                    <a:p>
+                      <a:r>
+                        <a:rPr sz="1100">
+                          <a:solidFill>
+                            <a:srgbClr val="3D424E"/>
+                          </a:solidFill>
+                        </a:rPr>
+                        <a:t>Pesquisa indireta com seres humanos — requer CEP</a:t>
+                      </a:r>
+                    </a:p>
+                  </a:txBody>
+                  <a:tcPr>
+                    <a:solidFill>
+                      <a:srgbClr val="E8EAED"/>
+                    </a:solidFill>
+                  </a:tcPr>
+                </a:tc>
+                <a:tc>
+                  <a:txBody>
+                    <a:bodyPr/>
+                    <a:lstStyle/>
+                    <a:p>
+                      <a:r>
+                        <a:rPr sz="1100">
+                          <a:solidFill>
+                            <a:srgbClr val="3D424E"/>
+                          </a:solidFill>
+                        </a:rPr>
+                        <a:t>Dispensa CEP — apenas Declaração de Responsabilidade</a:t>
+                      </a:r>
+                    </a:p>
+                  </a:txBody>
+                  <a:tcPr>
+                    <a:solidFill>
+                      <a:srgbClr val="E8EAED"/>
+                    </a:solidFill>
+                  </a:tcPr>
+                </a:tc>
+              </a:tr>
+            </a:tbl>
+          </a:graphicData>
+        </a:graphic>
+      </p:graphicFrame>
+      <p:sp>
+        <p:nvSpPr>
+          <p:cNvPr id="5" name="TextBox 4"/>
+          <p:cNvSpPr txBox="1"/>
+          <p:nvPr/>
+        </p:nvSpPr>
+        <p:spPr>
+          <a:xfrm>
+            <a:off x="457200" y="6446520"/>
+            <a:ext cx="11430000" cy="365760"/>
+          </a:xfrm>
+          <a:prstGeom prst="rect">
+            <a:avLst/>
+          </a:prstGeom>
+          <a:noFill/>
+        </p:spPr>
+        <p:txBody>
+          <a:bodyPr wrap="none">
+            <a:spAutoFit/>
+          </a:bodyPr>
+          <a:lstStyle/>
+          <a:p>
+            <a:pPr>
+              <a:defRPr sz="1000" i="1">
+                <a:solidFill>
+                  <a:srgbClr val="707682"/>
+                </a:solidFill>
+              </a:defRPr>
+            </a:pPr>
+            <a:r>
+              <a:t>Rigor metodológico preservado via estratificação; escala adaptada à equipe interna.</a:t>
+            </a:r>
+          </a:p>
+        </p:txBody>
+      </p:sp>
+    </p:spTree>
+  </p:cSld>
+  <p:clrMapOvr>
+    <a:masterClrMapping/>
+  </p:clrMapOvr>
+</p:sld>
+</file>
+
+<file path=ppt/slides/slide21.xml><?xml version="1.0" encoding="utf-8"?>
+<p:sld xmlns:a="http://schemas.openxmlformats.org/drawingml/2006/main" xmlns:p="http://schemas.openxmlformats.org/presentationml/2006/main" xmlns:r="http://schemas.openxmlformats.org/officeDocument/2006/relationships">
+  <p:cSld>
+    <p:spTree>
+      <p:nvGrpSpPr>
+        <p:cNvPr id="1" name=""/>
+        <p:cNvGrpSpPr/>
+        <p:nvPr/>
+      </p:nvGrpSpPr>
+      <p:grpSpPr/>
+      <p:sp>
+        <p:nvSpPr>
+          <p:cNvPr id="2" name="TextBox 1"/>
+          <p:cNvSpPr txBox="1"/>
+          <p:nvPr/>
+        </p:nvSpPr>
+        <p:spPr>
+          <a:xfrm>
+            <a:off x="457200" y="365760"/>
+            <a:ext cx="11430000" cy="822960"/>
+          </a:xfrm>
+          <a:prstGeom prst="rect">
+            <a:avLst/>
+          </a:prstGeom>
+          <a:noFill/>
+        </p:spPr>
+        <p:txBody>
+          <a:bodyPr wrap="square">
+            <a:spAutoFit/>
+          </a:bodyPr>
+          <a:lstStyle/>
+          <a:p>
+            <a:pPr>
+              <a:defRPr sz="2600" b="1">
+                <a:solidFill>
+                  <a:srgbClr val="1F2A4E"/>
+                </a:solidFill>
+              </a:defRPr>
+            </a:pPr>
+            <a:r>
+              <a:t>Próximos passos administrativos</a:t>
+            </a:r>
+          </a:p>
+        </p:txBody>
+      </p:sp>
+      <p:sp>
+        <p:nvSpPr>
+          <p:cNvPr id="3" name="Rectangle 2"/>
+          <p:cNvSpPr/>
+          <p:nvPr/>
+        </p:nvSpPr>
+        <p:spPr>
+          <a:xfrm>
+            <a:off x="457200" y="1143000"/>
+            <a:ext cx="11430000" cy="36576"/>
+          </a:xfrm>
+          <a:prstGeom prst="rect">
+            <a:avLst/>
+          </a:prstGeom>
+          <a:solidFill>
+            <a:srgbClr val="1F2A4E"/>
+          </a:solidFill>
+          <a:ln>
+            <a:noFill/>
+          </a:ln>
+        </p:spPr>
+        <p:style>
+          <a:lnRef idx="1">
+            <a:schemeClr val="accent1"/>
+          </a:lnRef>
+          <a:fillRef idx="3">
+            <a:schemeClr val="accent1"/>
+          </a:fillRef>
+          <a:effectRef idx="2">
+            <a:schemeClr val="accent1"/>
+          </a:effectRef>
+          <a:fontRef idx="minor">
+            <a:schemeClr val="lt1"/>
+          </a:fontRef>
+        </p:style>
+        <p:txBody>
+          <a:bodyPr rtlCol="0" anchor="ctr"/>
+          <a:lstStyle/>
+          <a:p>
+            <a:pPr algn="ctr"/>
+          </a:p>
+        </p:txBody>
+      </p:sp>
+      <p:sp>
+        <p:nvSpPr>
+          <p:cNvPr id="4" name="TextBox 3"/>
+          <p:cNvSpPr txBox="1"/>
+          <p:nvPr/>
+        </p:nvSpPr>
+        <p:spPr>
+          <a:xfrm>
+            <a:off x="457200" y="1371600"/>
+            <a:ext cx="11430000" cy="4937760"/>
+          </a:xfrm>
+          <a:prstGeom prst="rect">
+            <a:avLst/>
+          </a:prstGeom>
+          <a:noFill/>
+        </p:spPr>
+        <p:txBody>
+          <a:bodyPr wrap="square">
+            <a:spAutoFit/>
+          </a:bodyPr>
+          <a:lstStyle/>
+          <a:p>
+            <a:pPr>
+              <a:spcAft>
+                <a:spcPts val="800"/>
+              </a:spcAft>
+            </a:pPr>
+            <a:r>
+              <a:rPr sz="1600" b="1">
+                <a:solidFill>
+                  <a:srgbClr val="1F2A4E"/>
+                </a:solidFill>
+              </a:rPr>
+              <a:t>1.  </a:t>
+            </a:r>
+            <a:r>
+              <a:rPr sz="1600">
+                <a:solidFill>
+                  <a:srgbClr val="3D424E"/>
+                </a:solidFill>
+              </a:rPr>
+              <a:t>Confirmar hoje quem é o(a) Chefe do Departamento (3ª assinatura necessária)</a:t>
+            </a:r>
+          </a:p>
+          <a:p>
+            <a:pPr>
+              <a:spcAft>
+                <a:spcPts val="800"/>
+              </a:spcAft>
+            </a:pPr>
+            <a:r>
+              <a:rPr sz="1600" b="1">
+                <a:solidFill>
+                  <a:srgbClr val="1F2A4E"/>
+                </a:solidFill>
+              </a:rPr>
+              <a:t>2.  </a:t>
+            </a:r>
+            <a:r>
+              <a:rPr sz="1600">
+                <a:solidFill>
+                  <a:srgbClr val="3D424E"/>
+                </a:solidFill>
+              </a:rPr>
+              <a:t>Baixar modelo de Declaração de Responsabilidade em http://www.cep.unifesp.br/cep</a:t>
+            </a:r>
+          </a:p>
+          <a:p>
+            <a:pPr>
+              <a:spcAft>
+                <a:spcPts val="800"/>
+              </a:spcAft>
+            </a:pPr>
+            <a:r>
+              <a:rPr sz="1600" b="1">
+                <a:solidFill>
+                  <a:srgbClr val="1F2A4E"/>
+                </a:solidFill>
+              </a:rPr>
+              <a:t>3.  </a:t>
+            </a:r>
+            <a:r>
+              <a:rPr sz="1600">
+                <a:solidFill>
+                  <a:srgbClr val="3D424E"/>
+                </a:solidFill>
+              </a:rPr>
+              <a:t>Coletar 3 assinaturas: Mestrando + Orientador + Chefe de Departamento</a:t>
+            </a:r>
+          </a:p>
+          <a:p>
+            <a:pPr>
+              <a:spcAft>
+                <a:spcPts val="800"/>
+              </a:spcAft>
+            </a:pPr>
+            <a:r>
+              <a:rPr sz="1600" b="1">
+                <a:solidFill>
+                  <a:srgbClr val="1F2A4E"/>
+                </a:solidFill>
+              </a:rPr>
+              <a:t>4.  </a:t>
+            </a:r>
+            <a:r>
+              <a:rPr sz="1600">
+                <a:solidFill>
+                  <a:srgbClr val="3D424E"/>
+                </a:solidFill>
+              </a:rPr>
+              <a:t>Anexar Declaração assinada à entrega da qualificação</a:t>
+            </a:r>
+          </a:p>
+          <a:p>
+            <a:pPr>
+              <a:spcAft>
+                <a:spcPts val="800"/>
+              </a:spcAft>
+            </a:pPr>
+            <a:r>
+              <a:rPr sz="1600" b="1">
+                <a:solidFill>
+                  <a:srgbClr val="1F2A4E"/>
+                </a:solidFill>
+              </a:rPr>
+              <a:t>5.  </a:t>
+            </a:r>
+            <a:r>
+              <a:rPr sz="1600">
+                <a:solidFill>
+                  <a:srgbClr val="3D424E"/>
+                </a:solidFill>
+              </a:rPr>
+              <a:t>Incluir parágrafo metodológico no Cap 4 sobre dispensa CEP (Art. 8º)</a:t>
+            </a:r>
+          </a:p>
+          <a:p>
+            <a:pPr>
+              <a:spcAft>
+                <a:spcPts val="800"/>
+              </a:spcAft>
+            </a:pPr>
+            <a:r>
+              <a:rPr sz="1600" b="1">
+                <a:solidFill>
+                  <a:srgbClr val="1F2A4E"/>
+                </a:solidFill>
+              </a:rPr>
+              <a:t>  </a:t>
+            </a:r>
+            <a:r>
+              <a:rPr sz="1600">
+                <a:solidFill>
+                  <a:srgbClr val="3D424E"/>
+                </a:solidFill>
+              </a:rPr>
+              <a:t/>
+            </a:r>
+          </a:p>
+          <a:p>
+            <a:pPr>
+              <a:spcAft>
+                <a:spcPts val="800"/>
+              </a:spcAft>
+            </a:pPr>
+            <a:r>
+              <a:rPr sz="1600" b="1">
+                <a:solidFill>
+                  <a:srgbClr val="1F2A4E"/>
+                </a:solidFill>
+              </a:rPr>
+              <a:t>Trâmite sugerido:  </a:t>
+            </a:r>
+            <a:r>
+              <a:rPr sz="1600">
+                <a:solidFill>
+                  <a:srgbClr val="3D424E"/>
+                </a:solidFill>
+              </a:rPr>
+              <a:t>SEI Unifesp para tramitação eletrônica das assinaturas</a:t>
+            </a:r>
+          </a:p>
+        </p:txBody>
+      </p:sp>
+    </p:spTree>
+  </p:cSld>
+  <p:clrMapOvr>
+    <a:masterClrMapping/>
+  </p:clrMapOvr>
+</p:sld>
+</file>
+
+<file path=ppt/slides/slide22.xml><?xml version="1.0" encoding="utf-8"?>
 <p:sld xmlns:a="http://schemas.openxmlformats.org/drawingml/2006/main" xmlns:p="http://schemas.openxmlformats.org/presentationml/2006/main" xmlns:r="http://schemas.openxmlformats.org/officeDocument/2006/relationships">
   <p:cSld>
     <p:spTree>
@@ -6763,7 +7368,7 @@
               </a:defRPr>
             </a:pPr>
             <a:r>
-              <a:t>Decisões a alinhar e próximos passos</a:t>
+              <a:t>Estudo comparativo do Capítulo 2</a:t>
             </a:r>
           </a:p>
           <a:p>
@@ -6775,7 +7380,7 @@
               </a:defRPr>
             </a:pPr>
             <a:r>
-              <a:t>Reta final para a primeira revisão em 15/jul/2026</a:t>
+              <a:t>4 configurações de conditioning — proposta + alternativa moderna</a:t>
             </a:r>
           </a:p>
         </p:txBody>
@@ -6788,7 +7393,7 @@
 </p:sld>
 </file>
 
-<file path=ppt/slides/slide21.xml><?xml version="1.0" encoding="utf-8"?>
+<file path=ppt/slides/slide23.xml><?xml version="1.0" encoding="utf-8"?>
 <p:sld xmlns:a="http://schemas.openxmlformats.org/drawingml/2006/main" xmlns:p="http://schemas.openxmlformats.org/presentationml/2006/main" xmlns:r="http://schemas.openxmlformats.org/officeDocument/2006/relationships">
   <p:cSld>
     <p:spTree>
@@ -6828,7 +7433,7 @@
               </a:defRPr>
             </a:pPr>
             <a:r>
-              <a:t>Decisões a alinhar hoje</a:t>
+              <a:t>4 configurações de conditioning comparadas</a:t>
             </a:r>
           </a:p>
         </p:txBody>
@@ -6876,16 +7481,426 @@
           </a:p>
         </p:txBody>
       </p:sp>
-      <p:sp>
-        <p:nvSpPr>
-          <p:cNvPr id="4" name="TextBox 3"/>
+      <p:graphicFrame>
+        <p:nvGraphicFramePr>
+          <p:cNvPr id="4" name="Table 3"/>
+          <p:cNvGraphicFramePr>
+            <a:graphicFrameLocks noGrp="1"/>
+          </p:cNvGraphicFramePr>
+          <p:nvPr/>
+        </p:nvGraphicFramePr>
+        <p:xfrm>
+          <a:off x="457200" y="1371600"/>
+          <a:ext cx="11887200" cy="4754880"/>
+        </p:xfrm>
+        <a:graphic>
+          <a:graphicData uri="http://schemas.openxmlformats.org/drawingml/2006/table">
+            <a:tbl>
+              <a:tblPr firstRow="1" bandRow="1">
+                <a:tableStyleId>{5C22544A-7EE6-4342-B048-85BDC9FD1C3A}</a:tableStyleId>
+              </a:tblPr>
+              <a:tblGrid>
+                <a:gridCol w="914400"/>
+                <a:gridCol w="3200400"/>
+                <a:gridCol w="4114800"/>
+                <a:gridCol w="3657600"/>
+              </a:tblGrid>
+              <a:tr h="950976">
+                <a:tc>
+                  <a:txBody>
+                    <a:bodyPr/>
+                    <a:lstStyle/>
+                    <a:p>
+                      <a:r>
+                        <a:rPr sz="1300" b="1">
+                          <a:solidFill>
+                            <a:srgbClr val="FFFFFF"/>
+                          </a:solidFill>
+                        </a:rPr>
+                        <a:t>Config</a:t>
+                      </a:r>
+                    </a:p>
+                  </a:txBody>
+                  <a:tcPr>
+                    <a:solidFill>
+                      <a:srgbClr val="1F2A4E"/>
+                    </a:solidFill>
+                  </a:tcPr>
+                </a:tc>
+                <a:tc>
+                  <a:txBody>
+                    <a:bodyPr/>
+                    <a:lstStyle/>
+                    <a:p>
+                      <a:r>
+                        <a:rPr sz="1300" b="1">
+                          <a:solidFill>
+                            <a:srgbClr val="FFFFFF"/>
+                          </a:solidFill>
+                        </a:rPr>
+                        <a:t>Arquitetura</a:t>
+                      </a:r>
+                    </a:p>
+                  </a:txBody>
+                  <a:tcPr>
+                    <a:solidFill>
+                      <a:srgbClr val="1F2A4E"/>
+                    </a:solidFill>
+                  </a:tcPr>
+                </a:tc>
+                <a:tc>
+                  <a:txBody>
+                    <a:bodyPr/>
+                    <a:lstStyle/>
+                    <a:p>
+                      <a:r>
+                        <a:rPr sz="1300" b="1">
+                          <a:solidFill>
+                            <a:srgbClr val="FFFFFF"/>
+                          </a:solidFill>
+                        </a:rPr>
+                        <a:t>Sinal de conditioning</a:t>
+                      </a:r>
+                    </a:p>
+                  </a:txBody>
+                  <a:tcPr>
+                    <a:solidFill>
+                      <a:srgbClr val="1F2A4E"/>
+                    </a:solidFill>
+                  </a:tcPr>
+                </a:tc>
+                <a:tc>
+                  <a:txBody>
+                    <a:bodyPr/>
+                    <a:lstStyle/>
+                    <a:p>
+                      <a:r>
+                        <a:rPr sz="1300" b="1">
+                          <a:solidFill>
+                            <a:srgbClr val="FFFFFF"/>
+                          </a:solidFill>
+                        </a:rPr>
+                        <a:t>Origem</a:t>
+                      </a:r>
+                    </a:p>
+                  </a:txBody>
+                  <a:tcPr>
+                    <a:solidFill>
+                      <a:srgbClr val="1F2A4E"/>
+                    </a:solidFill>
+                  </a:tcPr>
+                </a:tc>
+              </a:tr>
+              <a:tr h="950976">
+                <a:tc>
+                  <a:txBody>
+                    <a:bodyPr/>
+                    <a:lstStyle/>
+                    <a:p>
+                      <a:r>
+                        <a:rPr sz="1100">
+                          <a:solidFill>
+                            <a:srgbClr val="3D424E"/>
+                          </a:solidFill>
+                        </a:rPr>
+                        <a:t>A</a:t>
+                      </a:r>
+                    </a:p>
+                  </a:txBody>
+                  <a:tcPr/>
+                </a:tc>
+                <a:tc>
+                  <a:txBody>
+                    <a:bodyPr/>
+                    <a:lstStyle/>
+                    <a:p>
+                      <a:r>
+                        <a:rPr sz="1100">
+                          <a:solidFill>
+                            <a:srgbClr val="3D424E"/>
+                          </a:solidFill>
+                        </a:rPr>
+                        <a:t>ConvNeXt-T baseline</a:t>
+                      </a:r>
+                    </a:p>
+                  </a:txBody>
+                  <a:tcPr/>
+                </a:tc>
+                <a:tc>
+                  <a:txBody>
+                    <a:bodyPr/>
+                    <a:lstStyle/>
+                    <a:p>
+                      <a:r>
+                        <a:rPr sz="1100">
+                          <a:solidFill>
+                            <a:srgbClr val="3D424E"/>
+                          </a:solidFill>
+                        </a:rPr>
+                        <a:t>Sem conditioning</a:t>
+                      </a:r>
+                    </a:p>
+                  </a:txBody>
+                  <a:tcPr/>
+                </a:tc>
+                <a:tc>
+                  <a:txBody>
+                    <a:bodyPr/>
+                    <a:lstStyle/>
+                    <a:p>
+                      <a:r>
+                        <a:rPr sz="1100">
+                          <a:solidFill>
+                            <a:srgbClr val="3D424E"/>
+                          </a:solidFill>
+                        </a:rPr>
+                        <a:t>Controle</a:t>
+                      </a:r>
+                    </a:p>
+                  </a:txBody>
+                  <a:tcPr/>
+                </a:tc>
+              </a:tr>
+              <a:tr h="950976">
+                <a:tc>
+                  <a:txBody>
+                    <a:bodyPr/>
+                    <a:lstStyle/>
+                    <a:p>
+                      <a:r>
+                        <a:rPr sz="1100">
+                          <a:solidFill>
+                            <a:srgbClr val="3D424E"/>
+                          </a:solidFill>
+                        </a:rPr>
+                        <a:t>B</a:t>
+                      </a:r>
+                    </a:p>
+                  </a:txBody>
+                  <a:tcPr>
+                    <a:solidFill>
+                      <a:srgbClr val="E8EAED"/>
+                    </a:solidFill>
+                  </a:tcPr>
+                </a:tc>
+                <a:tc>
+                  <a:txBody>
+                    <a:bodyPr/>
+                    <a:lstStyle/>
+                    <a:p>
+                      <a:r>
+                        <a:rPr sz="1100">
+                          <a:solidFill>
+                            <a:srgbClr val="3D424E"/>
+                          </a:solidFill>
+                        </a:rPr>
+                        <a:t>ConvNeXt-T + FiLM</a:t>
+                      </a:r>
+                    </a:p>
+                  </a:txBody>
+                  <a:tcPr>
+                    <a:solidFill>
+                      <a:srgbClr val="E8EAED"/>
+                    </a:solidFill>
+                  </a:tcPr>
+                </a:tc>
+                <a:tc>
+                  <a:txBody>
+                    <a:bodyPr/>
+                    <a:lstStyle/>
+                    <a:p>
+                      <a:r>
+                        <a:rPr sz="1100">
+                          <a:solidFill>
+                            <a:srgbClr val="3D424E"/>
+                          </a:solidFill>
+                        </a:rPr>
+                        <a:t>MST 10-dim → γ, β</a:t>
+                      </a:r>
+                    </a:p>
+                  </a:txBody>
+                  <a:tcPr>
+                    <a:solidFill>
+                      <a:srgbClr val="E8EAED"/>
+                    </a:solidFill>
+                  </a:tcPr>
+                </a:tc>
+                <a:tc>
+                  <a:txBody>
+                    <a:bodyPr/>
+                    <a:lstStyle/>
+                    <a:p>
+                      <a:r>
+                        <a:rPr sz="1100">
+                          <a:solidFill>
+                            <a:srgbClr val="3D424E"/>
+                          </a:solidFill>
+                        </a:rPr>
+                        <a:t>Proposta principal (linha tradicional)</a:t>
+                      </a:r>
+                    </a:p>
+                  </a:txBody>
+                  <a:tcPr>
+                    <a:solidFill>
+                      <a:srgbClr val="E8EAED"/>
+                    </a:solidFill>
+                  </a:tcPr>
+                </a:tc>
+              </a:tr>
+              <a:tr h="950976">
+                <a:tc>
+                  <a:txBody>
+                    <a:bodyPr/>
+                    <a:lstStyle/>
+                    <a:p>
+                      <a:r>
+                        <a:rPr sz="1100">
+                          <a:solidFill>
+                            <a:srgbClr val="3D424E"/>
+                          </a:solidFill>
+                        </a:rPr>
+                        <a:t>C</a:t>
+                      </a:r>
+                    </a:p>
+                  </a:txBody>
+                  <a:tcPr/>
+                </a:tc>
+                <a:tc>
+                  <a:txBody>
+                    <a:bodyPr/>
+                    <a:lstStyle/>
+                    <a:p>
+                      <a:r>
+                        <a:rPr sz="1100">
+                          <a:solidFill>
+                            <a:srgbClr val="3D424E"/>
+                          </a:solidFill>
+                        </a:rPr>
+                        <a:t>ConvNeXt-T + Gated FiLM</a:t>
+                      </a:r>
+                    </a:p>
+                  </a:txBody>
+                  <a:tcPr/>
+                </a:tc>
+                <a:tc>
+                  <a:txBody>
+                    <a:bodyPr/>
+                    <a:lstStyle/>
+                    <a:p>
+                      <a:r>
+                        <a:rPr sz="1100">
+                          <a:solidFill>
+                            <a:srgbClr val="3D424E"/>
+                          </a:solidFill>
+                        </a:rPr>
+                        <a:t>MST 10-dim → γ, β não-lineares</a:t>
+                      </a:r>
+                    </a:p>
+                  </a:txBody>
+                  <a:tcPr/>
+                </a:tc>
+                <a:tc>
+                  <a:txBody>
+                    <a:bodyPr/>
+                    <a:lstStyle/>
+                    <a:p>
+                      <a:r>
+                        <a:rPr sz="1100">
+                          <a:solidFill>
+                            <a:srgbClr val="3D424E"/>
+                          </a:solidFill>
+                        </a:rPr>
+                        <a:t>Ablação metodológica</a:t>
+                      </a:r>
+                    </a:p>
+                  </a:txBody>
+                  <a:tcPr/>
+                </a:tc>
+              </a:tr>
+              <a:tr h="950976">
+                <a:tc>
+                  <a:txBody>
+                    <a:bodyPr/>
+                    <a:lstStyle/>
+                    <a:p>
+                      <a:r>
+                        <a:rPr sz="1100">
+                          <a:solidFill>
+                            <a:srgbClr val="3D424E"/>
+                          </a:solidFill>
+                        </a:rPr>
+                        <a:t>D</a:t>
+                      </a:r>
+                    </a:p>
+                  </a:txBody>
+                  <a:tcPr/>
+                </a:tc>
+                <a:tc>
+                  <a:txBody>
+                    <a:bodyPr/>
+                    <a:lstStyle/>
+                    <a:p>
+                      <a:r>
+                        <a:rPr sz="1100">
+                          <a:solidFill>
+                            <a:srgbClr val="3D424E"/>
+                          </a:solidFill>
+                        </a:rPr>
+                        <a:t>ConvNeXt-T + FiLM</a:t>
+                      </a:r>
+                    </a:p>
+                  </a:txBody>
+                  <a:tcPr/>
+                </a:tc>
+                <a:tc>
+                  <a:txBody>
+                    <a:bodyPr/>
+                    <a:lstStyle/>
+                    <a:p>
+                      <a:r>
+                        <a:rPr sz="1100">
+                          <a:solidFill>
+                            <a:srgbClr val="3D424E"/>
+                          </a:solidFill>
+                        </a:rPr>
+                        <a:t>Embedding CLIP-text 512-dim</a:t>
+                      </a:r>
+                    </a:p>
+                  </a:txBody>
+                  <a:tcPr/>
+                </a:tc>
+                <a:tc>
+                  <a:txBody>
+                    <a:bodyPr/>
+                    <a:lstStyle/>
+                    <a:p>
+                      <a:r>
+                        <a:rPr sz="1100">
+                          <a:solidFill>
+                            <a:srgbClr val="3D424E"/>
+                          </a:solidFill>
+                        </a:rPr>
+                        <a:t>Avaliação alternativa (orientador)</a:t>
+                      </a:r>
+                    </a:p>
+                  </a:txBody>
+                  <a:tcPr/>
+                </a:tc>
+              </a:tr>
+            </a:tbl>
+          </a:graphicData>
+        </a:graphic>
+      </p:graphicFrame>
+      <p:sp>
+        <p:nvSpPr>
+          <p:cNvPr id="5" name="TextBox 4"/>
           <p:cNvSpPr txBox="1"/>
           <p:nvPr/>
         </p:nvSpPr>
         <p:spPr>
           <a:xfrm>
-            <a:off x="457200" y="1371600"/>
-            <a:ext cx="11430000" cy="4937760"/>
+            <a:off x="457200" y="6446520"/>
+            <a:ext cx="11430000" cy="365760"/>
           </a:xfrm>
           <a:prstGeom prst="rect">
             <a:avLst/>
@@ -6893,123 +7908,20 @@
           <a:noFill/>
         </p:spPr>
         <p:txBody>
-          <a:bodyPr wrap="square">
+          <a:bodyPr wrap="none">
             <a:spAutoFit/>
           </a:bodyPr>
           <a:lstStyle/>
           <a:p>
             <a:pPr>
-              <a:spcAft>
-                <a:spcPts val="800"/>
-              </a:spcAft>
-            </a:pPr>
-            <a:r>
-              <a:rPr sz="1600" b="1">
-                <a:solidFill>
-                  <a:srgbClr val="1F2A4E"/>
-                </a:solidFill>
-              </a:rPr>
-              <a:t>1.  </a:t>
-            </a:r>
-            <a:r>
-              <a:rPr sz="1600">
-                <a:solidFill>
-                  <a:srgbClr val="3D424E"/>
-                </a:solidFill>
-              </a:rPr>
-              <a:t>Promover H6 para OE-6 formal — decomposição quantitativa pixel info × skin tone?</a:t>
-            </a:r>
-          </a:p>
-          <a:p>
-            <a:pPr>
-              <a:spcAft>
-                <a:spcPts val="800"/>
-              </a:spcAft>
-            </a:pPr>
-            <a:r>
-              <a:rPr sz="1600" b="1">
-                <a:solidFill>
-                  <a:srgbClr val="1F2A4E"/>
-                </a:solidFill>
-              </a:rPr>
-              <a:t>2.  </a:t>
-            </a:r>
-            <a:r>
-              <a:rPr sz="1600">
-                <a:solidFill>
-                  <a:srgbClr val="3D424E"/>
-                </a:solidFill>
-              </a:rPr>
-              <a:t>Estudo comparativo com 4 configurações atende à recomendação anterior?</a:t>
-            </a:r>
-          </a:p>
-          <a:p>
-            <a:pPr>
-              <a:spcAft>
-                <a:spcPts val="800"/>
-              </a:spcAft>
-            </a:pPr>
-            <a:r>
-              <a:rPr sz="1600" b="1">
-                <a:solidFill>
-                  <a:srgbClr val="1F2A4E"/>
-                </a:solidFill>
-              </a:rPr>
-              <a:t>3.  </a:t>
-            </a:r>
-            <a:r>
-              <a:rPr sz="1600">
-                <a:solidFill>
-                  <a:srgbClr val="3D424E"/>
-                </a:solidFill>
-              </a:rPr>
-              <a:t>Há template Overleaf institucional Unifesp / ICT ou seguimos com o padrão?</a:t>
-            </a:r>
-          </a:p>
-          <a:p>
-            <a:pPr>
-              <a:spcAft>
-                <a:spcPts val="800"/>
-              </a:spcAft>
-            </a:pPr>
-            <a:r>
-              <a:rPr sz="1600" b="1">
-                <a:solidFill>
-                  <a:srgbClr val="1F2A4E"/>
-                </a:solidFill>
-              </a:rPr>
-              <a:t>4.  </a:t>
-            </a:r>
-            <a:r>
-              <a:rPr sz="1600">
-                <a:solidFill>
-                  <a:srgbClr val="3D424E"/>
-                </a:solidFill>
-              </a:rPr>
-              <a:t>Co-orientador — alguma definição?</a:t>
-            </a:r>
-          </a:p>
-          <a:p>
-            <a:pPr>
-              <a:spcAft>
-                <a:spcPts val="800"/>
-              </a:spcAft>
-            </a:pPr>
-            <a:r>
-              <a:rPr sz="1600" b="1">
-                <a:solidFill>
-                  <a:srgbClr val="1F2A4E"/>
-                </a:solidFill>
-              </a:rPr>
-              <a:t>5.  </a:t>
-            </a:r>
-            <a:r>
-              <a:rPr sz="1600">
-                <a:solidFill>
-                  <a:srgbClr val="3D424E"/>
-                </a:solidFill>
-              </a:rPr>
-              <a:t>Sugestões para a banca preliminar?</a:t>
+              <a:defRPr sz="1000" i="1">
+                <a:solidFill>
+                  <a:srgbClr val="707682"/>
+                </a:solidFill>
+              </a:defRPr>
+            </a:pPr>
+            <a:r>
+              <a:t>Atende recomendação da reunião 15/jun: linha tradicional + avaliação CLIP.</a:t>
             </a:r>
           </a:p>
         </p:txBody>
@@ -7022,7 +7934,150 @@
 </p:sld>
 </file>
 
-<file path=ppt/slides/slide22.xml><?xml version="1.0" encoding="utf-8"?>
+<file path=ppt/slides/slide24.xml><?xml version="1.0" encoding="utf-8"?>
+<p:sld xmlns:a="http://schemas.openxmlformats.org/drawingml/2006/main" xmlns:p="http://schemas.openxmlformats.org/presentationml/2006/main" xmlns:r="http://schemas.openxmlformats.org/officeDocument/2006/relationships">
+  <p:cSld>
+    <p:spTree>
+      <p:nvGrpSpPr>
+        <p:cNvPr id="1" name=""/>
+        <p:cNvGrpSpPr/>
+        <p:nvPr/>
+      </p:nvGrpSpPr>
+      <p:grpSpPr/>
+      <p:sp>
+        <p:nvSpPr>
+          <p:cNvPr id="2" name="Rectangle 1"/>
+          <p:cNvSpPr/>
+          <p:nvPr/>
+        </p:nvSpPr>
+        <p:spPr>
+          <a:xfrm>
+            <a:off x="0" y="0"/>
+            <a:ext cx="12188952" cy="6858000"/>
+          </a:xfrm>
+          <a:prstGeom prst="rect">
+            <a:avLst/>
+          </a:prstGeom>
+          <a:solidFill>
+            <a:srgbClr val="1F2A4E"/>
+          </a:solidFill>
+          <a:ln>
+            <a:noFill/>
+          </a:ln>
+        </p:spPr>
+        <p:style>
+          <a:lnRef idx="1">
+            <a:schemeClr val="accent1"/>
+          </a:lnRef>
+          <a:fillRef idx="3">
+            <a:schemeClr val="accent1"/>
+          </a:fillRef>
+          <a:effectRef idx="2">
+            <a:schemeClr val="accent1"/>
+          </a:effectRef>
+          <a:fontRef idx="minor">
+            <a:schemeClr val="lt1"/>
+          </a:fontRef>
+        </p:style>
+        <p:txBody>
+          <a:bodyPr rtlCol="0" anchor="ctr"/>
+          <a:lstStyle/>
+          <a:p>
+            <a:pPr algn="ctr"/>
+          </a:p>
+        </p:txBody>
+      </p:sp>
+      <p:sp>
+        <p:nvSpPr>
+          <p:cNvPr id="3" name="TextBox 2"/>
+          <p:cNvSpPr txBox="1"/>
+          <p:nvPr/>
+        </p:nvSpPr>
+        <p:spPr>
+          <a:xfrm>
+            <a:off x="731520" y="1371600"/>
+            <a:ext cx="2743200" cy="2743200"/>
+          </a:xfrm>
+          <a:prstGeom prst="rect">
+            <a:avLst/>
+          </a:prstGeom>
+          <a:noFill/>
+        </p:spPr>
+        <p:txBody>
+          <a:bodyPr wrap="none">
+            <a:spAutoFit/>
+          </a:bodyPr>
+          <a:lstStyle/>
+          <a:p>
+            <a:pPr>
+              <a:defRPr sz="14000" b="1">
+                <a:solidFill>
+                  <a:srgbClr val="FFFFFF"/>
+                </a:solidFill>
+              </a:defRPr>
+            </a:pPr>
+            <a:r>
+              <a:t>8</a:t>
+            </a:r>
+          </a:p>
+        </p:txBody>
+      </p:sp>
+      <p:sp>
+        <p:nvSpPr>
+          <p:cNvPr id="4" name="TextBox 3"/>
+          <p:cNvSpPr txBox="1"/>
+          <p:nvPr/>
+        </p:nvSpPr>
+        <p:spPr>
+          <a:xfrm>
+            <a:off x="3931920" y="2286000"/>
+            <a:ext cx="7772400" cy="1828800"/>
+          </a:xfrm>
+          <a:prstGeom prst="rect">
+            <a:avLst/>
+          </a:prstGeom>
+          <a:noFill/>
+        </p:spPr>
+        <p:txBody>
+          <a:bodyPr wrap="square">
+            <a:spAutoFit/>
+          </a:bodyPr>
+          <a:lstStyle/>
+          <a:p>
+            <a:pPr>
+              <a:defRPr sz="3600" b="1">
+                <a:solidFill>
+                  <a:srgbClr val="FFFFFF"/>
+                </a:solidFill>
+              </a:defRPr>
+            </a:pPr>
+            <a:r>
+              <a:t>Decisões, solicitação pessoal e próximos passos</a:t>
+            </a:r>
+          </a:p>
+          <a:p>
+            <a:pPr>
+              <a:defRPr sz="1800">
+                <a:solidFill>
+                  <a:srgbClr val="E8EAED"/>
+                </a:solidFill>
+              </a:defRPr>
+            </a:pPr>
+            <a:r>
+              <a:t>Alinhamento final e planejamento da reta de escrita</a:t>
+            </a:r>
+          </a:p>
+        </p:txBody>
+      </p:sp>
+    </p:spTree>
+  </p:cSld>
+  <p:clrMapOvr>
+    <a:masterClrMapping/>
+  </p:clrMapOvr>
+</p:sld>
+</file>
+
+<file path=ppt/slides/slide25.xml><?xml version="1.0" encoding="utf-8"?>
 <p:sld xmlns:a="http://schemas.openxmlformats.org/drawingml/2006/main" xmlns:p="http://schemas.openxmlformats.org/presentationml/2006/main" xmlns:r="http://schemas.openxmlformats.org/officeDocument/2006/relationships">
   <p:cSld>
     <p:spTree>
@@ -7062,7 +8117,7 @@
               </a:defRPr>
             </a:pPr>
             <a:r>
-              <a:t>Próximas 3 semanas — plano de escrita</a:t>
+              <a:t>Decisões a alinhar hoje</a:t>
             </a:r>
           </a:p>
         </p:txBody>
@@ -7110,344 +8165,16 @@
           </a:p>
         </p:txBody>
       </p:sp>
-      <p:graphicFrame>
-        <p:nvGraphicFramePr>
-          <p:cNvPr id="4" name="Table 3"/>
-          <p:cNvGraphicFramePr>
-            <a:graphicFrameLocks noGrp="1"/>
-          </p:cNvGraphicFramePr>
-          <p:nvPr/>
-        </p:nvGraphicFramePr>
-        <p:xfrm>
-          <a:off x="457200" y="1371600"/>
-          <a:ext cx="11430000" cy="4754880"/>
-        </p:xfrm>
-        <a:graphic>
-          <a:graphicData uri="http://schemas.openxmlformats.org/drawingml/2006/table">
-            <a:tbl>
-              <a:tblPr firstRow="1" bandRow="1">
-                <a:tableStyleId>{5C22544A-7EE6-4342-B048-85BDC9FD1C3A}</a:tableStyleId>
-              </a:tblPr>
-              <a:tblGrid>
-                <a:gridCol w="1371600"/>
-                <a:gridCol w="2286000"/>
-                <a:gridCol w="7772400"/>
-              </a:tblGrid>
-              <a:tr h="950976">
-                <a:tc>
-                  <a:txBody>
-                    <a:bodyPr/>
-                    <a:lstStyle/>
-                    <a:p>
-                      <a:r>
-                        <a:rPr sz="1300" b="1">
-                          <a:solidFill>
-                            <a:srgbClr val="FFFFFF"/>
-                          </a:solidFill>
-                        </a:rPr>
-                        <a:t>Semana</a:t>
-                      </a:r>
-                    </a:p>
-                  </a:txBody>
-                  <a:tcPr>
-                    <a:solidFill>
-                      <a:srgbClr val="1F2A4E"/>
-                    </a:solidFill>
-                  </a:tcPr>
-                </a:tc>
-                <a:tc>
-                  <a:txBody>
-                    <a:bodyPr/>
-                    <a:lstStyle/>
-                    <a:p>
-                      <a:r>
-                        <a:rPr sz="1300" b="1">
-                          <a:solidFill>
-                            <a:srgbClr val="FFFFFF"/>
-                          </a:solidFill>
-                        </a:rPr>
-                        <a:t>Período</a:t>
-                      </a:r>
-                    </a:p>
-                  </a:txBody>
-                  <a:tcPr>
-                    <a:solidFill>
-                      <a:srgbClr val="1F2A4E"/>
-                    </a:solidFill>
-                  </a:tcPr>
-                </a:tc>
-                <a:tc>
-                  <a:txBody>
-                    <a:bodyPr/>
-                    <a:lstStyle/>
-                    <a:p>
-                      <a:r>
-                        <a:rPr sz="1300" b="1">
-                          <a:solidFill>
-                            <a:srgbClr val="FFFFFF"/>
-                          </a:solidFill>
-                        </a:rPr>
-                        <a:t>Entregável</a:t>
-                      </a:r>
-                    </a:p>
-                  </a:txBody>
-                  <a:tcPr>
-                    <a:solidFill>
-                      <a:srgbClr val="1F2A4E"/>
-                    </a:solidFill>
-                  </a:tcPr>
-                </a:tc>
-              </a:tr>
-              <a:tr h="950976">
-                <a:tc>
-                  <a:txBody>
-                    <a:bodyPr/>
-                    <a:lstStyle/>
-                    <a:p>
-                      <a:r>
-                        <a:rPr sz="1100">
-                          <a:solidFill>
-                            <a:srgbClr val="3D424E"/>
-                          </a:solidFill>
-                        </a:rPr>
-                        <a:t>1 (esta)</a:t>
-                      </a:r>
-                    </a:p>
-                  </a:txBody>
-                  <a:tcPr>
-                    <a:solidFill>
-                      <a:srgbClr val="E8EAED"/>
-                    </a:solidFill>
-                  </a:tcPr>
-                </a:tc>
-                <a:tc>
-                  <a:txBody>
-                    <a:bodyPr/>
-                    <a:lstStyle/>
-                    <a:p>
-                      <a:r>
-                        <a:rPr sz="1100">
-                          <a:solidFill>
-                            <a:srgbClr val="3D424E"/>
-                          </a:solidFill>
-                        </a:rPr>
-                        <a:t>29/jun - 05/jul</a:t>
-                      </a:r>
-                    </a:p>
-                  </a:txBody>
-                  <a:tcPr>
-                    <a:solidFill>
-                      <a:srgbClr val="E8EAED"/>
-                    </a:solidFill>
-                  </a:tcPr>
-                </a:tc>
-                <a:tc>
-                  <a:txBody>
-                    <a:bodyPr/>
-                    <a:lstStyle/>
-                    <a:p>
-                      <a:r>
-                        <a:rPr sz="1100">
-                          <a:solidFill>
-                            <a:srgbClr val="3D424E"/>
-                          </a:solidFill>
-                        </a:rPr>
-                        <a:t>Setup Overleaf + Capítulo 1 (Introdução)</a:t>
-                      </a:r>
-                    </a:p>
-                  </a:txBody>
-                  <a:tcPr>
-                    <a:solidFill>
-                      <a:srgbClr val="E8EAED"/>
-                    </a:solidFill>
-                  </a:tcPr>
-                </a:tc>
-              </a:tr>
-              <a:tr h="950976">
-                <a:tc>
-                  <a:txBody>
-                    <a:bodyPr/>
-                    <a:lstStyle/>
-                    <a:p>
-                      <a:r>
-                        <a:rPr sz="1100">
-                          <a:solidFill>
-                            <a:srgbClr val="3D424E"/>
-                          </a:solidFill>
-                        </a:rPr>
-                        <a:t>2</a:t>
-                      </a:r>
-                    </a:p>
-                  </a:txBody>
-                  <a:tcPr/>
-                </a:tc>
-                <a:tc>
-                  <a:txBody>
-                    <a:bodyPr/>
-                    <a:lstStyle/>
-                    <a:p>
-                      <a:r>
-                        <a:rPr sz="1100">
-                          <a:solidFill>
-                            <a:srgbClr val="3D424E"/>
-                          </a:solidFill>
-                        </a:rPr>
-                        <a:t>06 - 12/jul</a:t>
-                      </a:r>
-                    </a:p>
-                  </a:txBody>
-                  <a:tcPr/>
-                </a:tc>
-                <a:tc>
-                  <a:txBody>
-                    <a:bodyPr/>
-                    <a:lstStyle/>
-                    <a:p>
-                      <a:r>
-                        <a:rPr sz="1100">
-                          <a:solidFill>
-                            <a:srgbClr val="3D424E"/>
-                          </a:solidFill>
-                        </a:rPr>
-                        <a:t>Capítulo 2 (Revisão) + Capítulo 3 (Objetivos)</a:t>
-                      </a:r>
-                    </a:p>
-                  </a:txBody>
-                  <a:tcPr/>
-                </a:tc>
-              </a:tr>
-              <a:tr h="950976">
-                <a:tc>
-                  <a:txBody>
-                    <a:bodyPr/>
-                    <a:lstStyle/>
-                    <a:p>
-                      <a:r>
-                        <a:rPr sz="1100">
-                          <a:solidFill>
-                            <a:srgbClr val="3D424E"/>
-                          </a:solidFill>
-                        </a:rPr>
-                        <a:t>3</a:t>
-                      </a:r>
-                    </a:p>
-                  </a:txBody>
-                  <a:tcPr/>
-                </a:tc>
-                <a:tc>
-                  <a:txBody>
-                    <a:bodyPr/>
-                    <a:lstStyle/>
-                    <a:p>
-                      <a:r>
-                        <a:rPr sz="1100">
-                          <a:solidFill>
-                            <a:srgbClr val="3D424E"/>
-                          </a:solidFill>
-                        </a:rPr>
-                        <a:t>13 - 14/jul</a:t>
-                      </a:r>
-                    </a:p>
-                  </a:txBody>
-                  <a:tcPr/>
-                </a:tc>
-                <a:tc>
-                  <a:txBody>
-                    <a:bodyPr/>
-                    <a:lstStyle/>
-                    <a:p>
-                      <a:r>
-                        <a:rPr sz="1100">
-                          <a:solidFill>
-                            <a:srgbClr val="3D424E"/>
-                          </a:solidFill>
-                        </a:rPr>
-                        <a:t>Capítulo 4 (Metodologia) + Capítulo 5 (Cronograma) + revisão</a:t>
-                      </a:r>
-                    </a:p>
-                  </a:txBody>
-                  <a:tcPr/>
-                </a:tc>
-              </a:tr>
-              <a:tr h="950976">
-                <a:tc>
-                  <a:txBody>
-                    <a:bodyPr/>
-                    <a:lstStyle/>
-                    <a:p>
-                      <a:r>
-                        <a:rPr sz="1100">
-                          <a:solidFill>
-                            <a:srgbClr val="3D424E"/>
-                          </a:solidFill>
-                        </a:rPr>
-                        <a:t>Target</a:t>
-                      </a:r>
-                    </a:p>
-                  </a:txBody>
-                  <a:tcPr>
-                    <a:solidFill>
-                      <a:srgbClr val="E8EAED"/>
-                    </a:solidFill>
-                  </a:tcPr>
-                </a:tc>
-                <a:tc>
-                  <a:txBody>
-                    <a:bodyPr/>
-                    <a:lstStyle/>
-                    <a:p>
-                      <a:r>
-                        <a:rPr sz="1100">
-                          <a:solidFill>
-                            <a:srgbClr val="3D424E"/>
-                          </a:solidFill>
-                        </a:rPr>
-                        <a:t>15/jul</a:t>
-                      </a:r>
-                    </a:p>
-                  </a:txBody>
-                  <a:tcPr>
-                    <a:solidFill>
-                      <a:srgbClr val="E8EAED"/>
-                    </a:solidFill>
-                  </a:tcPr>
-                </a:tc>
-                <a:tc>
-                  <a:txBody>
-                    <a:bodyPr/>
-                    <a:lstStyle/>
-                    <a:p>
-                      <a:r>
-                        <a:rPr sz="1100">
-                          <a:solidFill>
-                            <a:srgbClr val="3D424E"/>
-                          </a:solidFill>
-                        </a:rPr>
-                        <a:t>Entrega da primeira revisão ao orientador</a:t>
-                      </a:r>
-                    </a:p>
-                  </a:txBody>
-                  <a:tcPr>
-                    <a:solidFill>
-                      <a:srgbClr val="E8EAED"/>
-                    </a:solidFill>
-                  </a:tcPr>
-                </a:tc>
-              </a:tr>
-            </a:tbl>
-          </a:graphicData>
-        </a:graphic>
-      </p:graphicFrame>
-      <p:sp>
-        <p:nvSpPr>
-          <p:cNvPr id="5" name="TextBox 4"/>
+      <p:sp>
+        <p:nvSpPr>
+          <p:cNvPr id="4" name="TextBox 3"/>
           <p:cNvSpPr txBox="1"/>
           <p:nvPr/>
         </p:nvSpPr>
         <p:spPr>
           <a:xfrm>
-            <a:off x="457200" y="6446520"/>
-            <a:ext cx="11430000" cy="365760"/>
+            <a:off x="457200" y="1371600"/>
+            <a:ext cx="11430000" cy="4937760"/>
           </a:xfrm>
           <a:prstGeom prst="rect">
             <a:avLst/>
@@ -7455,20 +8182,146 @@
           <a:noFill/>
         </p:spPr>
         <p:txBody>
-          <a:bodyPr wrap="none">
+          <a:bodyPr wrap="square">
             <a:spAutoFit/>
           </a:bodyPr>
           <a:lstStyle/>
           <a:p>
             <a:pPr>
-              <a:defRPr sz="1000" i="1">
-                <a:solidFill>
-                  <a:srgbClr val="707682"/>
-                </a:solidFill>
-              </a:defRPr>
-            </a:pPr>
-            <a:r>
-              <a:t>Plano enxuto — 17 dias para entregar 5 capítulos + revisão final.</a:t>
+              <a:spcAft>
+                <a:spcPts val="800"/>
+              </a:spcAft>
+            </a:pPr>
+            <a:r>
+              <a:rPr sz="1600" b="1">
+                <a:solidFill>
+                  <a:srgbClr val="1F2A4E"/>
+                </a:solidFill>
+              </a:rPr>
+              <a:t>1.  </a:t>
+            </a:r>
+            <a:r>
+              <a:rPr sz="1600">
+                <a:solidFill>
+                  <a:srgbClr val="3D424E"/>
+                </a:solidFill>
+              </a:rPr>
+              <a:t>Promover H6 para OE-6 formal — decomposição quantitativa pixel info × skin tone?</a:t>
+            </a:r>
+          </a:p>
+          <a:p>
+            <a:pPr>
+              <a:spcAft>
+                <a:spcPts val="800"/>
+              </a:spcAft>
+            </a:pPr>
+            <a:r>
+              <a:rPr sz="1600" b="1">
+                <a:solidFill>
+                  <a:srgbClr val="1F2A4E"/>
+                </a:solidFill>
+              </a:rPr>
+              <a:t>2.  </a:t>
+            </a:r>
+            <a:r>
+              <a:rPr sz="1600">
+                <a:solidFill>
+                  <a:srgbClr val="3D424E"/>
+                </a:solidFill>
+              </a:rPr>
+              <a:t>Estudo comparativo com 4 configurações atende à recomendação anterior?</a:t>
+            </a:r>
+          </a:p>
+          <a:p>
+            <a:pPr>
+              <a:spcAft>
+                <a:spcPts val="800"/>
+              </a:spcAft>
+            </a:pPr>
+            <a:r>
+              <a:rPr sz="1600" b="1">
+                <a:solidFill>
+                  <a:srgbClr val="1F2A4E"/>
+                </a:solidFill>
+              </a:rPr>
+              <a:t>3.  </a:t>
+            </a:r>
+            <a:r>
+              <a:rPr sz="1600">
+                <a:solidFill>
+                  <a:srgbClr val="3D424E"/>
+                </a:solidFill>
+              </a:rPr>
+              <a:t>Há template Overleaf institucional Unifesp / ICT ou seguimos com o padrão?</a:t>
+            </a:r>
+          </a:p>
+          <a:p>
+            <a:pPr>
+              <a:spcAft>
+                <a:spcPts val="800"/>
+              </a:spcAft>
+            </a:pPr>
+            <a:r>
+              <a:rPr sz="1600" b="1">
+                <a:solidFill>
+                  <a:srgbClr val="1F2A4E"/>
+                </a:solidFill>
+              </a:rPr>
+              <a:t>4.  </a:t>
+            </a:r>
+            <a:r>
+              <a:rPr sz="1600">
+                <a:solidFill>
+                  <a:srgbClr val="3D424E"/>
+                </a:solidFill>
+              </a:rPr>
+              <a:t>Co-orientador — alguma definição?</a:t>
+            </a:r>
+          </a:p>
+          <a:p>
+            <a:pPr>
+              <a:spcAft>
+                <a:spcPts val="800"/>
+              </a:spcAft>
+            </a:pPr>
+            <a:r>
+              <a:rPr sz="1600" b="1">
+                <a:solidFill>
+                  <a:srgbClr val="1F2A4E"/>
+                </a:solidFill>
+              </a:rPr>
+              <a:t>5.  </a:t>
+            </a:r>
+            <a:r>
+              <a:rPr sz="1600">
+                <a:solidFill>
+                  <a:srgbClr val="3D424E"/>
+                </a:solidFill>
+              </a:rPr>
+              <a:t>Chefe do Departamento — quem assina a Declaração de Responsabilidade do CEP?</a:t>
+            </a:r>
+          </a:p>
+          <a:p>
+            <a:pPr>
+              <a:spcAft>
+                <a:spcPts val="800"/>
+              </a:spcAft>
+            </a:pPr>
+            <a:r>
+              <a:rPr sz="1600" b="1">
+                <a:solidFill>
+                  <a:srgbClr val="1F2A4E"/>
+                </a:solidFill>
+              </a:rPr>
+              <a:t>6.  </a:t>
+            </a:r>
+            <a:r>
+              <a:rPr sz="1600">
+                <a:solidFill>
+                  <a:srgbClr val="3D424E"/>
+                </a:solidFill>
+              </a:rPr>
+              <a:t>Trâmite formal para solicitar extensão de prazo (próximo slide)?</a:t>
             </a:r>
           </a:p>
         </p:txBody>
@@ -7481,7 +8334,7 @@
 </p:sld>
 </file>
 
-<file path=ppt/slides/slide23.xml><?xml version="1.0" encoding="utf-8"?>
+<file path=ppt/slides/slide26.xml><?xml version="1.0" encoding="utf-8"?>
 <p:sld xmlns:a="http://schemas.openxmlformats.org/drawingml/2006/main" xmlns:p="http://schemas.openxmlformats.org/presentationml/2006/main" xmlns:r="http://schemas.openxmlformats.org/officeDocument/2006/relationships">
   <p:cSld>
     <p:spTree>
@@ -7521,7 +8374,7 @@
               </a:defRPr>
             </a:pPr>
             <a:r>
-              <a:t>Próximos passos imediatos (esta semana)</a:t>
+              <a:t>Solicitação pessoal — extensão de prazo</a:t>
             </a:r>
           </a:p>
         </p:txBody>
@@ -7602,7 +8455,7 @@
                   <a:srgbClr val="1F2A4E"/>
                 </a:solidFill>
               </a:rPr>
-              <a:t>1.  </a:t>
+              <a:t>Motivo:  </a:t>
             </a:r>
             <a:r>
               <a:rPr sz="1600">
@@ -7610,7 +8463,7 @@
                   <a:srgbClr val="3D424E"/>
                 </a:solidFill>
               </a:rPr>
-              <a:t>Setup Overleaf com template institucional</a:t>
+              <a:t>nascimento de minha filha em 28/março/2026</a:t>
             </a:r>
           </a:p>
           <a:p>
@@ -7625,7 +8478,7 @@
                   <a:srgbClr val="1F2A4E"/>
                 </a:solidFill>
               </a:rPr>
-              <a:t>2.  </a:t>
+              <a:t>  </a:t>
             </a:r>
             <a:r>
               <a:rPr sz="1600">
@@ -7633,7 +8486,7 @@
                   <a:srgbClr val="3D424E"/>
                 </a:solidFill>
               </a:rPr>
-              <a:t>Importar bibliografia consolidada — referencias.bib com 104 entradas</a:t>
+              <a:t>Período de afastamento das atividades acadêmicas nas semanas subsequentes para cuidado parental</a:t>
             </a:r>
           </a:p>
           <a:p>
@@ -7648,7 +8501,7 @@
                   <a:srgbClr val="1F2A4E"/>
                 </a:solidFill>
               </a:rPr>
-              <a:t>3.  </a:t>
+              <a:t>  </a:t>
             </a:r>
             <a:r>
               <a:rPr sz="1600">
@@ -7656,7 +8509,7 @@
                   <a:srgbClr val="3D424E"/>
                 </a:solidFill>
               </a:rPr>
-              <a:t>Iniciar escrita do Capítulo 1 — Introdução</a:t>
+              <a:t/>
             </a:r>
           </a:p>
           <a:p>
@@ -7671,7 +8524,7 @@
                   <a:srgbClr val="1F2A4E"/>
                 </a:solidFill>
               </a:rPr>
-              <a:t>4.  </a:t>
+              <a:t>Solicitação:  </a:t>
             </a:r>
             <a:r>
               <a:rPr sz="1600">
@@ -7679,7 +8532,7 @@
                   <a:srgbClr val="3D424E"/>
                 </a:solidFill>
               </a:rPr>
-              <a:t>Promover OE-6 se aprovado nesta reunião</a:t>
+              <a:t>extensão de 2 meses no prazo da primeira revisão</a:t>
             </a:r>
           </a:p>
           <a:p>
@@ -7694,7 +8547,7 @@
                   <a:srgbClr val="1F2A4E"/>
                 </a:solidFill>
               </a:rPr>
-              <a:t>5.  </a:t>
+              <a:t>Prazo original:  </a:t>
             </a:r>
             <a:r>
               <a:rPr sz="1600">
@@ -7702,7 +8555,7 @@
                   <a:srgbClr val="3D424E"/>
                 </a:solidFill>
               </a:rPr>
-              <a:t>Continuar leitura aprofundada da Camada 2 em paralelo à escrita</a:t>
+              <a:t>15/jul/2026</a:t>
             </a:r>
           </a:p>
           <a:p>
@@ -7717,7 +8570,7 @@
                   <a:srgbClr val="1F2A4E"/>
                 </a:solidFill>
               </a:rPr>
-              <a:t>  </a:t>
+              <a:t>Prazo solicitado:  </a:t>
             </a:r>
             <a:r>
               <a:rPr sz="1600">
@@ -7725,7 +8578,7 @@
                   <a:srgbClr val="3D424E"/>
                 </a:solidFill>
               </a:rPr>
-              <a:t/>
+              <a:t>15/set/2026</a:t>
             </a:r>
           </a:p>
           <a:p>
@@ -7740,7 +8593,7 @@
                   <a:srgbClr val="1F2A4E"/>
                 </a:solidFill>
               </a:rPr>
-              <a:t>Entrega para próxima reunião:  </a:t>
+              <a:t>  </a:t>
             </a:r>
             <a:r>
               <a:rPr sz="1600">
@@ -7748,7 +8601,53 @@
                   <a:srgbClr val="3D424E"/>
                 </a:solidFill>
               </a:rPr>
-              <a:t>Capítulo 1 escrito em LaTeX + estrutura dos capítulos 2 a 5</a:t>
+              <a:t/>
+            </a:r>
+          </a:p>
+          <a:p>
+            <a:pPr>
+              <a:spcAft>
+                <a:spcPts val="800"/>
+              </a:spcAft>
+            </a:pPr>
+            <a:r>
+              <a:rPr sz="1600" b="1">
+                <a:solidFill>
+                  <a:srgbClr val="1F2A4E"/>
+                </a:solidFill>
+              </a:rPr>
+              <a:t>Documento:  </a:t>
+            </a:r>
+            <a:r>
+              <a:rPr sz="1600">
+                <a:solidFill>
+                  <a:srgbClr val="3D424E"/>
+                </a:solidFill>
+              </a:rPr>
+              <a:t>carta formal redigida em 2 parágrafos, pronta para envio via SEI ou conforme trâmite indicado pelo Programa</a:t>
+            </a:r>
+          </a:p>
+          <a:p>
+            <a:pPr>
+              <a:spcAft>
+                <a:spcPts val="800"/>
+              </a:spcAft>
+            </a:pPr>
+            <a:r>
+              <a:rPr sz="1600" b="1">
+                <a:solidFill>
+                  <a:srgbClr val="1F2A4E"/>
+                </a:solidFill>
+              </a:rPr>
+              <a:t>Pergunta:  </a:t>
+            </a:r>
+            <a:r>
+              <a:rPr sz="1600">
+                <a:solidFill>
+                  <a:srgbClr val="3D424E"/>
+                </a:solidFill>
+              </a:rPr>
+              <a:t>qual é o trâmite formal correto para protocolar a solicitação?</a:t>
             </a:r>
           </a:p>
         </p:txBody>
@@ -7761,7 +8660,688 @@
 </p:sld>
 </file>
 
-<file path=ppt/slides/slide24.xml><?xml version="1.0" encoding="utf-8"?>
+<file path=ppt/slides/slide27.xml><?xml version="1.0" encoding="utf-8"?>
+<p:sld xmlns:a="http://schemas.openxmlformats.org/drawingml/2006/main" xmlns:p="http://schemas.openxmlformats.org/presentationml/2006/main" xmlns:r="http://schemas.openxmlformats.org/officeDocument/2006/relationships">
+  <p:cSld>
+    <p:spTree>
+      <p:nvGrpSpPr>
+        <p:cNvPr id="1" name=""/>
+        <p:cNvGrpSpPr/>
+        <p:nvPr/>
+      </p:nvGrpSpPr>
+      <p:grpSpPr/>
+      <p:sp>
+        <p:nvSpPr>
+          <p:cNvPr id="2" name="TextBox 1"/>
+          <p:cNvSpPr txBox="1"/>
+          <p:nvPr/>
+        </p:nvSpPr>
+        <p:spPr>
+          <a:xfrm>
+            <a:off x="457200" y="365760"/>
+            <a:ext cx="11430000" cy="822960"/>
+          </a:xfrm>
+          <a:prstGeom prst="rect">
+            <a:avLst/>
+          </a:prstGeom>
+          <a:noFill/>
+        </p:spPr>
+        <p:txBody>
+          <a:bodyPr wrap="square">
+            <a:spAutoFit/>
+          </a:bodyPr>
+          <a:lstStyle/>
+          <a:p>
+            <a:pPr>
+              <a:defRPr sz="2600" b="1">
+                <a:solidFill>
+                  <a:srgbClr val="1F2A4E"/>
+                </a:solidFill>
+              </a:defRPr>
+            </a:pPr>
+            <a:r>
+              <a:t>Plano de escrita — dois cenários (com e sem extensão)</a:t>
+            </a:r>
+          </a:p>
+        </p:txBody>
+      </p:sp>
+      <p:sp>
+        <p:nvSpPr>
+          <p:cNvPr id="3" name="Rectangle 2"/>
+          <p:cNvSpPr/>
+          <p:nvPr/>
+        </p:nvSpPr>
+        <p:spPr>
+          <a:xfrm>
+            <a:off x="457200" y="1143000"/>
+            <a:ext cx="11430000" cy="36576"/>
+          </a:xfrm>
+          <a:prstGeom prst="rect">
+            <a:avLst/>
+          </a:prstGeom>
+          <a:solidFill>
+            <a:srgbClr val="1F2A4E"/>
+          </a:solidFill>
+          <a:ln>
+            <a:noFill/>
+          </a:ln>
+        </p:spPr>
+        <p:style>
+          <a:lnRef idx="1">
+            <a:schemeClr val="accent1"/>
+          </a:lnRef>
+          <a:fillRef idx="3">
+            <a:schemeClr val="accent1"/>
+          </a:fillRef>
+          <a:effectRef idx="2">
+            <a:schemeClr val="accent1"/>
+          </a:effectRef>
+          <a:fontRef idx="minor">
+            <a:schemeClr val="lt1"/>
+          </a:fontRef>
+        </p:style>
+        <p:txBody>
+          <a:bodyPr rtlCol="0" anchor="ctr"/>
+          <a:lstStyle/>
+          <a:p>
+            <a:pPr algn="ctr"/>
+          </a:p>
+        </p:txBody>
+      </p:sp>
+      <p:graphicFrame>
+        <p:nvGraphicFramePr>
+          <p:cNvPr id="4" name="Table 3"/>
+          <p:cNvGraphicFramePr>
+            <a:graphicFrameLocks noGrp="1"/>
+          </p:cNvGraphicFramePr>
+          <p:nvPr/>
+        </p:nvGraphicFramePr>
+        <p:xfrm>
+          <a:off x="457200" y="1371600"/>
+          <a:ext cx="11887200" cy="4754880"/>
+        </p:xfrm>
+        <a:graphic>
+          <a:graphicData uri="http://schemas.openxmlformats.org/drawingml/2006/table">
+            <a:tbl>
+              <a:tblPr firstRow="1" bandRow="1">
+                <a:tableStyleId>{5C22544A-7EE6-4342-B048-85BDC9FD1C3A}</a:tableStyleId>
+              </a:tblPr>
+              <a:tblGrid>
+                <a:gridCol w="1828800"/>
+                <a:gridCol w="2743200"/>
+                <a:gridCol w="5029200"/>
+                <a:gridCol w="2286000"/>
+              </a:tblGrid>
+              <a:tr h="1584960">
+                <a:tc>
+                  <a:txBody>
+                    <a:bodyPr/>
+                    <a:lstStyle/>
+                    <a:p>
+                      <a:r>
+                        <a:rPr sz="1300" b="1">
+                          <a:solidFill>
+                            <a:srgbClr val="FFFFFF"/>
+                          </a:solidFill>
+                        </a:rPr>
+                        <a:t>Cenário</a:t>
+                      </a:r>
+                    </a:p>
+                  </a:txBody>
+                  <a:tcPr>
+                    <a:solidFill>
+                      <a:srgbClr val="1F2A4E"/>
+                    </a:solidFill>
+                  </a:tcPr>
+                </a:tc>
+                <a:tc>
+                  <a:txBody>
+                    <a:bodyPr/>
+                    <a:lstStyle/>
+                    <a:p>
+                      <a:r>
+                        <a:rPr sz="1300" b="1">
+                          <a:solidFill>
+                            <a:srgbClr val="FFFFFF"/>
+                          </a:solidFill>
+                        </a:rPr>
+                        <a:t>Janela</a:t>
+                      </a:r>
+                    </a:p>
+                  </a:txBody>
+                  <a:tcPr>
+                    <a:solidFill>
+                      <a:srgbClr val="1F2A4E"/>
+                    </a:solidFill>
+                  </a:tcPr>
+                </a:tc>
+                <a:tc>
+                  <a:txBody>
+                    <a:bodyPr/>
+                    <a:lstStyle/>
+                    <a:p>
+                      <a:r>
+                        <a:rPr sz="1300" b="1">
+                          <a:solidFill>
+                            <a:srgbClr val="FFFFFF"/>
+                          </a:solidFill>
+                        </a:rPr>
+                        <a:t>Ritmo de escrita</a:t>
+                      </a:r>
+                    </a:p>
+                  </a:txBody>
+                  <a:tcPr>
+                    <a:solidFill>
+                      <a:srgbClr val="1F2A4E"/>
+                    </a:solidFill>
+                  </a:tcPr>
+                </a:tc>
+                <a:tc>
+                  <a:txBody>
+                    <a:bodyPr/>
+                    <a:lstStyle/>
+                    <a:p>
+                      <a:r>
+                        <a:rPr sz="1300" b="1">
+                          <a:solidFill>
+                            <a:srgbClr val="FFFFFF"/>
+                          </a:solidFill>
+                        </a:rPr>
+                        <a:t>Entrega</a:t>
+                      </a:r>
+                    </a:p>
+                  </a:txBody>
+                  <a:tcPr>
+                    <a:solidFill>
+                      <a:srgbClr val="1F2A4E"/>
+                    </a:solidFill>
+                  </a:tcPr>
+                </a:tc>
+              </a:tr>
+              <a:tr h="1584960">
+                <a:tc>
+                  <a:txBody>
+                    <a:bodyPr/>
+                    <a:lstStyle/>
+                    <a:p>
+                      <a:r>
+                        <a:rPr sz="1100">
+                          <a:solidFill>
+                            <a:srgbClr val="3D424E"/>
+                          </a:solidFill>
+                        </a:rPr>
+                        <a:t>Original</a:t>
+                      </a:r>
+                    </a:p>
+                  </a:txBody>
+                  <a:tcPr/>
+                </a:tc>
+                <a:tc>
+                  <a:txBody>
+                    <a:bodyPr/>
+                    <a:lstStyle/>
+                    <a:p>
+                      <a:r>
+                        <a:rPr sz="1100">
+                          <a:solidFill>
+                            <a:srgbClr val="3D424E"/>
+                          </a:solidFill>
+                        </a:rPr>
+                        <a:t>29/jun - 15/jul</a:t>
+                      </a:r>
+                    </a:p>
+                  </a:txBody>
+                  <a:tcPr/>
+                </a:tc>
+                <a:tc>
+                  <a:txBody>
+                    <a:bodyPr/>
+                    <a:lstStyle/>
+                    <a:p>
+                      <a:r>
+                        <a:rPr sz="1100">
+                          <a:solidFill>
+                            <a:srgbClr val="3D424E"/>
+                          </a:solidFill>
+                        </a:rPr>
+                        <a:t>Acelerado — 5 capítulos em 17 dias</a:t>
+                      </a:r>
+                    </a:p>
+                  </a:txBody>
+                  <a:tcPr/>
+                </a:tc>
+                <a:tc>
+                  <a:txBody>
+                    <a:bodyPr/>
+                    <a:lstStyle/>
+                    <a:p>
+                      <a:r>
+                        <a:rPr sz="1100">
+                          <a:solidFill>
+                            <a:srgbClr val="3D424E"/>
+                          </a:solidFill>
+                        </a:rPr>
+                        <a:t>15/jul/2026</a:t>
+                      </a:r>
+                    </a:p>
+                  </a:txBody>
+                  <a:tcPr/>
+                </a:tc>
+              </a:tr>
+              <a:tr h="1584960">
+                <a:tc>
+                  <a:txBody>
+                    <a:bodyPr/>
+                    <a:lstStyle/>
+                    <a:p>
+                      <a:r>
+                        <a:rPr sz="1100">
+                          <a:solidFill>
+                            <a:srgbClr val="3D424E"/>
+                          </a:solidFill>
+                        </a:rPr>
+                        <a:t>Com extensão</a:t>
+                      </a:r>
+                    </a:p>
+                  </a:txBody>
+                  <a:tcPr>
+                    <a:solidFill>
+                      <a:srgbClr val="E8EAED"/>
+                    </a:solidFill>
+                  </a:tcPr>
+                </a:tc>
+                <a:tc>
+                  <a:txBody>
+                    <a:bodyPr/>
+                    <a:lstStyle/>
+                    <a:p>
+                      <a:r>
+                        <a:rPr sz="1100">
+                          <a:solidFill>
+                            <a:srgbClr val="3D424E"/>
+                          </a:solidFill>
+                        </a:rPr>
+                        <a:t>29/jun - 15/set</a:t>
+                      </a:r>
+                    </a:p>
+                  </a:txBody>
+                  <a:tcPr>
+                    <a:solidFill>
+                      <a:srgbClr val="E8EAED"/>
+                    </a:solidFill>
+                  </a:tcPr>
+                </a:tc>
+                <a:tc>
+                  <a:txBody>
+                    <a:bodyPr/>
+                    <a:lstStyle/>
+                    <a:p>
+                      <a:r>
+                        <a:rPr sz="1100">
+                          <a:solidFill>
+                            <a:srgbClr val="3D424E"/>
+                          </a:solidFill>
+                        </a:rPr>
+                        <a:t>Sustentável — 5 capítulos em 78 dias com revisão</a:t>
+                      </a:r>
+                    </a:p>
+                  </a:txBody>
+                  <a:tcPr>
+                    <a:solidFill>
+                      <a:srgbClr val="E8EAED"/>
+                    </a:solidFill>
+                  </a:tcPr>
+                </a:tc>
+                <a:tc>
+                  <a:txBody>
+                    <a:bodyPr/>
+                    <a:lstStyle/>
+                    <a:p>
+                      <a:r>
+                        <a:rPr sz="1100">
+                          <a:solidFill>
+                            <a:srgbClr val="3D424E"/>
+                          </a:solidFill>
+                        </a:rPr>
+                        <a:t>15/set/2026</a:t>
+                      </a:r>
+                    </a:p>
+                  </a:txBody>
+                  <a:tcPr>
+                    <a:solidFill>
+                      <a:srgbClr val="E8EAED"/>
+                    </a:solidFill>
+                  </a:tcPr>
+                </a:tc>
+              </a:tr>
+            </a:tbl>
+          </a:graphicData>
+        </a:graphic>
+      </p:graphicFrame>
+      <p:sp>
+        <p:nvSpPr>
+          <p:cNvPr id="5" name="TextBox 4"/>
+          <p:cNvSpPr txBox="1"/>
+          <p:nvPr/>
+        </p:nvSpPr>
+        <p:spPr>
+          <a:xfrm>
+            <a:off x="457200" y="6446520"/>
+            <a:ext cx="11430000" cy="365760"/>
+          </a:xfrm>
+          <a:prstGeom prst="rect">
+            <a:avLst/>
+          </a:prstGeom>
+          <a:noFill/>
+        </p:spPr>
+        <p:txBody>
+          <a:bodyPr wrap="none">
+            <a:spAutoFit/>
+          </a:bodyPr>
+          <a:lstStyle/>
+          <a:p>
+            <a:pPr>
+              <a:defRPr sz="1000" i="1">
+                <a:solidFill>
+                  <a:srgbClr val="707682"/>
+                </a:solidFill>
+              </a:defRPr>
+            </a:pPr>
+            <a:r>
+              <a:t>Cenário com extensão preserva qualidade e permite revisão iterativa pelo orientador.</a:t>
+            </a:r>
+          </a:p>
+        </p:txBody>
+      </p:sp>
+    </p:spTree>
+  </p:cSld>
+  <p:clrMapOvr>
+    <a:masterClrMapping/>
+  </p:clrMapOvr>
+</p:sld>
+</file>
+
+<file path=ppt/slides/slide28.xml><?xml version="1.0" encoding="utf-8"?>
+<p:sld xmlns:a="http://schemas.openxmlformats.org/drawingml/2006/main" xmlns:p="http://schemas.openxmlformats.org/presentationml/2006/main" xmlns:r="http://schemas.openxmlformats.org/officeDocument/2006/relationships">
+  <p:cSld>
+    <p:spTree>
+      <p:nvGrpSpPr>
+        <p:cNvPr id="1" name=""/>
+        <p:cNvGrpSpPr/>
+        <p:nvPr/>
+      </p:nvGrpSpPr>
+      <p:grpSpPr/>
+      <p:sp>
+        <p:nvSpPr>
+          <p:cNvPr id="2" name="TextBox 1"/>
+          <p:cNvSpPr txBox="1"/>
+          <p:nvPr/>
+        </p:nvSpPr>
+        <p:spPr>
+          <a:xfrm>
+            <a:off x="457200" y="365760"/>
+            <a:ext cx="11430000" cy="822960"/>
+          </a:xfrm>
+          <a:prstGeom prst="rect">
+            <a:avLst/>
+          </a:prstGeom>
+          <a:noFill/>
+        </p:spPr>
+        <p:txBody>
+          <a:bodyPr wrap="square">
+            <a:spAutoFit/>
+          </a:bodyPr>
+          <a:lstStyle/>
+          <a:p>
+            <a:pPr>
+              <a:defRPr sz="2600" b="1">
+                <a:solidFill>
+                  <a:srgbClr val="1F2A4E"/>
+                </a:solidFill>
+              </a:defRPr>
+            </a:pPr>
+            <a:r>
+              <a:t>Próximos passos imediatos (esta semana)</a:t>
+            </a:r>
+          </a:p>
+        </p:txBody>
+      </p:sp>
+      <p:sp>
+        <p:nvSpPr>
+          <p:cNvPr id="3" name="Rectangle 2"/>
+          <p:cNvSpPr/>
+          <p:nvPr/>
+        </p:nvSpPr>
+        <p:spPr>
+          <a:xfrm>
+            <a:off x="457200" y="1143000"/>
+            <a:ext cx="11430000" cy="36576"/>
+          </a:xfrm>
+          <a:prstGeom prst="rect">
+            <a:avLst/>
+          </a:prstGeom>
+          <a:solidFill>
+            <a:srgbClr val="1F2A4E"/>
+          </a:solidFill>
+          <a:ln>
+            <a:noFill/>
+          </a:ln>
+        </p:spPr>
+        <p:style>
+          <a:lnRef idx="1">
+            <a:schemeClr val="accent1"/>
+          </a:lnRef>
+          <a:fillRef idx="3">
+            <a:schemeClr val="accent1"/>
+          </a:fillRef>
+          <a:effectRef idx="2">
+            <a:schemeClr val="accent1"/>
+          </a:effectRef>
+          <a:fontRef idx="minor">
+            <a:schemeClr val="lt1"/>
+          </a:fontRef>
+        </p:style>
+        <p:txBody>
+          <a:bodyPr rtlCol="0" anchor="ctr"/>
+          <a:lstStyle/>
+          <a:p>
+            <a:pPr algn="ctr"/>
+          </a:p>
+        </p:txBody>
+      </p:sp>
+      <p:sp>
+        <p:nvSpPr>
+          <p:cNvPr id="4" name="TextBox 3"/>
+          <p:cNvSpPr txBox="1"/>
+          <p:nvPr/>
+        </p:nvSpPr>
+        <p:spPr>
+          <a:xfrm>
+            <a:off x="457200" y="1371600"/>
+            <a:ext cx="11430000" cy="4937760"/>
+          </a:xfrm>
+          <a:prstGeom prst="rect">
+            <a:avLst/>
+          </a:prstGeom>
+          <a:noFill/>
+        </p:spPr>
+        <p:txBody>
+          <a:bodyPr wrap="square">
+            <a:spAutoFit/>
+          </a:bodyPr>
+          <a:lstStyle/>
+          <a:p>
+            <a:pPr>
+              <a:spcAft>
+                <a:spcPts val="800"/>
+              </a:spcAft>
+            </a:pPr>
+            <a:r>
+              <a:rPr sz="1600" b="1">
+                <a:solidFill>
+                  <a:srgbClr val="1F2A4E"/>
+                </a:solidFill>
+              </a:rPr>
+              <a:t>1.  </a:t>
+            </a:r>
+            <a:r>
+              <a:rPr sz="1600">
+                <a:solidFill>
+                  <a:srgbClr val="3D424E"/>
+                </a:solidFill>
+              </a:rPr>
+              <a:t>Setup Overleaf com template institucional</a:t>
+            </a:r>
+          </a:p>
+          <a:p>
+            <a:pPr>
+              <a:spcAft>
+                <a:spcPts val="800"/>
+              </a:spcAft>
+            </a:pPr>
+            <a:r>
+              <a:rPr sz="1600" b="1">
+                <a:solidFill>
+                  <a:srgbClr val="1F2A4E"/>
+                </a:solidFill>
+              </a:rPr>
+              <a:t>2.  </a:t>
+            </a:r>
+            <a:r>
+              <a:rPr sz="1600">
+                <a:solidFill>
+                  <a:srgbClr val="3D424E"/>
+                </a:solidFill>
+              </a:rPr>
+              <a:t>Importar bibliografia consolidada — referencias.bib com 104 entradas</a:t>
+            </a:r>
+          </a:p>
+          <a:p>
+            <a:pPr>
+              <a:spcAft>
+                <a:spcPts val="800"/>
+              </a:spcAft>
+            </a:pPr>
+            <a:r>
+              <a:rPr sz="1600" b="1">
+                <a:solidFill>
+                  <a:srgbClr val="1F2A4E"/>
+                </a:solidFill>
+              </a:rPr>
+              <a:t>3.  </a:t>
+            </a:r>
+            <a:r>
+              <a:rPr sz="1600">
+                <a:solidFill>
+                  <a:srgbClr val="3D424E"/>
+                </a:solidFill>
+              </a:rPr>
+              <a:t>Iniciar escrita do Capítulo 1 — Introdução</a:t>
+            </a:r>
+          </a:p>
+          <a:p>
+            <a:pPr>
+              <a:spcAft>
+                <a:spcPts val="800"/>
+              </a:spcAft>
+            </a:pPr>
+            <a:r>
+              <a:rPr sz="1600" b="1">
+                <a:solidFill>
+                  <a:srgbClr val="1F2A4E"/>
+                </a:solidFill>
+              </a:rPr>
+              <a:t>4.  </a:t>
+            </a:r>
+            <a:r>
+              <a:rPr sz="1600">
+                <a:solidFill>
+                  <a:srgbClr val="3D424E"/>
+                </a:solidFill>
+              </a:rPr>
+              <a:t>Promover OE-6 se aprovado nesta reunião</a:t>
+            </a:r>
+          </a:p>
+          <a:p>
+            <a:pPr>
+              <a:spcAft>
+                <a:spcPts val="800"/>
+              </a:spcAft>
+            </a:pPr>
+            <a:r>
+              <a:rPr sz="1600" b="1">
+                <a:solidFill>
+                  <a:srgbClr val="1F2A4E"/>
+                </a:solidFill>
+              </a:rPr>
+              <a:t>5.  </a:t>
+            </a:r>
+            <a:r>
+              <a:rPr sz="1600">
+                <a:solidFill>
+                  <a:srgbClr val="3D424E"/>
+                </a:solidFill>
+              </a:rPr>
+              <a:t>Continuar leitura aprofundada da Camada 2 em paralelo à escrita</a:t>
+            </a:r>
+          </a:p>
+          <a:p>
+            <a:pPr>
+              <a:spcAft>
+                <a:spcPts val="800"/>
+              </a:spcAft>
+            </a:pPr>
+            <a:r>
+              <a:rPr sz="1600" b="1">
+                <a:solidFill>
+                  <a:srgbClr val="1F2A4E"/>
+                </a:solidFill>
+              </a:rPr>
+              <a:t>  </a:t>
+            </a:r>
+            <a:r>
+              <a:rPr sz="1600">
+                <a:solidFill>
+                  <a:srgbClr val="3D424E"/>
+                </a:solidFill>
+              </a:rPr>
+              <a:t/>
+            </a:r>
+          </a:p>
+          <a:p>
+            <a:pPr>
+              <a:spcAft>
+                <a:spcPts val="800"/>
+              </a:spcAft>
+            </a:pPr>
+            <a:r>
+              <a:rPr sz="1600" b="1">
+                <a:solidFill>
+                  <a:srgbClr val="1F2A4E"/>
+                </a:solidFill>
+              </a:rPr>
+              <a:t>Entrega para próxima reunião:  </a:t>
+            </a:r>
+            <a:r>
+              <a:rPr sz="1600">
+                <a:solidFill>
+                  <a:srgbClr val="3D424E"/>
+                </a:solidFill>
+              </a:rPr>
+              <a:t>Capítulo 1 escrito em LaTeX + estrutura dos capítulos 2 a 5</a:t>
+            </a:r>
+          </a:p>
+        </p:txBody>
+      </p:sp>
+    </p:spTree>
+  </p:cSld>
+  <p:clrMapOvr>
+    <a:masterClrMapping/>
+  </p:clrMapOvr>
+</p:sld>
+</file>
+
+<file path=ppt/slides/slide29.xml><?xml version="1.0" encoding="utf-8"?>
 <p:sld xmlns:a="http://schemas.openxmlformats.org/drawingml/2006/main" xmlns:p="http://schemas.openxmlformats.org/presentationml/2006/main" xmlns:r="http://schemas.openxmlformats.org/officeDocument/2006/relationships">
   <p:cSld>
     <p:spTree>
